--- a/benin_insights_challenge/docs/TERROIR_pitch_deck_jury.pptx
+++ b/benin_insights_challenge/docs/TERROIR_pitch_deck_jury.pptx
@@ -5,15 +5,16 @@
     <p:sldMasterId id="2147483648" r:id="rId1"/>
   </p:sldMasterIdLst>
   <p:sldIdLst>
-    <p:sldId id="256" r:id="rId2"/>
-    <p:sldId id="257" r:id="rId3"/>
-    <p:sldId id="258" r:id="rId4"/>
-    <p:sldId id="262" r:id="rId5"/>
-    <p:sldId id="259" r:id="rId6"/>
-    <p:sldId id="260" r:id="rId7"/>
-    <p:sldId id="263" r:id="rId8"/>
+    <p:sldId id="256" r:id="rId7"/>
+    <p:sldId id="257" r:id="rId8"/>
+    <p:sldId id="258" r:id="rId9"/>
+    <p:sldId id="259" r:id="rId10"/>
+    <p:sldId id="260" r:id="rId11"/>
+    <p:sldId id="261" r:id="rId12"/>
+    <p:sldId id="262" r:id="rId13"/>
+    <p:sldId id="263" r:id="rId14"/>
   </p:sldIdLst>
-  <p:sldSz cx="12188825" cy="6858000"/>
+  <p:sldSz cx="12188952" cy="6858000" type="screen4x3"/>
   <p:notesSz cx="6858000" cy="9144000"/>
   <p:defaultTextStyle>
     <a:defPPr>
@@ -110,22 +111,6 @@
       </a:defRPr>
     </a:lvl9pPr>
   </p:defaultTextStyle>
-  <p:extLst>
-    <p:ext uri="{EFAFB233-063F-42B5-8137-9DF3F51BA10A}">
-      <p15:sldGuideLst xmlns:p15="http://schemas.microsoft.com/office/powerpoint/2012/main">
-        <p15:guide id="1" orient="horz" pos="2160">
-          <p15:clr>
-            <a:srgbClr val="A4A3A4"/>
-          </p15:clr>
-        </p15:guide>
-        <p15:guide id="2" pos="2880">
-          <p15:clr>
-            <a:srgbClr val="A4A3A4"/>
-          </p15:clr>
-        </p15:guide>
-      </p15:sldGuideLst>
-    </p:ext>
-  </p:extLst>
 </p:presentation>
 </file>
 
@@ -167,9 +152,10 @@
           <a:lstStyle/>
           <a:p>
             <a:r>
-              <a:rPr lang="en-US"/>
+              <a:rPr lang="en-US" smtClean="0"/>
               <a:t>Click to edit Master title style</a:t>
             </a:r>
+            <a:endParaRPr lang="en-US"/>
           </a:p>
         </p:txBody>
       </p:sp>
@@ -285,9 +271,10 @@
           </a:lstStyle>
           <a:p>
             <a:r>
-              <a:rPr lang="en-US"/>
+              <a:rPr lang="en-US" smtClean="0"/>
               <a:t>Click to edit Master subtitle style</a:t>
             </a:r>
+            <a:endParaRPr lang="en-US"/>
           </a:p>
         </p:txBody>
       </p:sp>
@@ -308,7 +295,7 @@
           <a:p>
             <a:fld id="{5BCAD085-E8A6-8845-BD4E-CB4CCA059FC4}" type="datetimeFigureOut">
               <a:rPr lang="en-US" smtClean="0"/>
-              <a:t>5/29/2026</a:t>
+              <a:t>1/27/13</a:t>
             </a:fld>
             <a:endParaRPr lang="en-US"/>
           </a:p>
@@ -402,9 +389,10 @@
           <a:lstStyle/>
           <a:p>
             <a:r>
-              <a:rPr lang="en-US"/>
+              <a:rPr lang="en-US" smtClean="0"/>
               <a:t>Click to edit Master title style</a:t>
             </a:r>
+            <a:endParaRPr lang="en-US"/>
           </a:p>
         </p:txBody>
       </p:sp>
@@ -425,37 +413,38 @@
           <a:p>
             <a:pPr lvl="0"/>
             <a:r>
-              <a:rPr lang="en-US"/>
+              <a:rPr lang="en-US" smtClean="0"/>
               <a:t>Click to edit Master text styles</a:t>
             </a:r>
           </a:p>
           <a:p>
             <a:pPr lvl="1"/>
             <a:r>
-              <a:rPr lang="en-US"/>
+              <a:rPr lang="en-US" smtClean="0"/>
               <a:t>Second level</a:t>
             </a:r>
           </a:p>
           <a:p>
             <a:pPr lvl="2"/>
             <a:r>
-              <a:rPr lang="en-US"/>
+              <a:rPr lang="en-US" smtClean="0"/>
               <a:t>Third level</a:t>
             </a:r>
           </a:p>
           <a:p>
             <a:pPr lvl="3"/>
             <a:r>
-              <a:rPr lang="en-US"/>
+              <a:rPr lang="en-US" smtClean="0"/>
               <a:t>Fourth level</a:t>
             </a:r>
           </a:p>
           <a:p>
             <a:pPr lvl="4"/>
             <a:r>
-              <a:rPr lang="en-US"/>
+              <a:rPr lang="en-US" smtClean="0"/>
               <a:t>Fifth level</a:t>
             </a:r>
+            <a:endParaRPr lang="en-US"/>
           </a:p>
         </p:txBody>
       </p:sp>
@@ -476,7 +465,7 @@
           <a:p>
             <a:fld id="{5BCAD085-E8A6-8845-BD4E-CB4CCA059FC4}" type="datetimeFigureOut">
               <a:rPr lang="en-US" smtClean="0"/>
-              <a:t>5/29/2026</a:t>
+              <a:t>1/27/13</a:t>
             </a:fld>
             <a:endParaRPr lang="en-US"/>
           </a:p>
@@ -575,9 +564,10 @@
           <a:lstStyle/>
           <a:p>
             <a:r>
-              <a:rPr lang="en-US"/>
+              <a:rPr lang="en-US" smtClean="0"/>
               <a:t>Click to edit Master title style</a:t>
             </a:r>
+            <a:endParaRPr lang="en-US"/>
           </a:p>
         </p:txBody>
       </p:sp>
@@ -603,37 +593,38 @@
           <a:p>
             <a:pPr lvl="0"/>
             <a:r>
-              <a:rPr lang="en-US"/>
+              <a:rPr lang="en-US" smtClean="0"/>
               <a:t>Click to edit Master text styles</a:t>
             </a:r>
           </a:p>
           <a:p>
             <a:pPr lvl="1"/>
             <a:r>
-              <a:rPr lang="en-US"/>
+              <a:rPr lang="en-US" smtClean="0"/>
               <a:t>Second level</a:t>
             </a:r>
           </a:p>
           <a:p>
             <a:pPr lvl="2"/>
             <a:r>
-              <a:rPr lang="en-US"/>
+              <a:rPr lang="en-US" smtClean="0"/>
               <a:t>Third level</a:t>
             </a:r>
           </a:p>
           <a:p>
             <a:pPr lvl="3"/>
             <a:r>
-              <a:rPr lang="en-US"/>
+              <a:rPr lang="en-US" smtClean="0"/>
               <a:t>Fourth level</a:t>
             </a:r>
           </a:p>
           <a:p>
             <a:pPr lvl="4"/>
             <a:r>
-              <a:rPr lang="en-US"/>
+              <a:rPr lang="en-US" smtClean="0"/>
               <a:t>Fifth level</a:t>
             </a:r>
+            <a:endParaRPr lang="en-US"/>
           </a:p>
         </p:txBody>
       </p:sp>
@@ -654,7 +645,7 @@
           <a:p>
             <a:fld id="{5BCAD085-E8A6-8845-BD4E-CB4CCA059FC4}" type="datetimeFigureOut">
               <a:rPr lang="en-US" smtClean="0"/>
-              <a:t>5/29/2026</a:t>
+              <a:t>1/27/13</a:t>
             </a:fld>
             <a:endParaRPr lang="en-US"/>
           </a:p>
@@ -748,9 +739,10 @@
           <a:lstStyle/>
           <a:p>
             <a:r>
-              <a:rPr lang="en-US"/>
+              <a:rPr lang="en-US" smtClean="0"/>
               <a:t>Click to edit Master title style</a:t>
             </a:r>
+            <a:endParaRPr lang="en-US"/>
           </a:p>
         </p:txBody>
       </p:sp>
@@ -771,37 +763,38 @@
           <a:p>
             <a:pPr lvl="0"/>
             <a:r>
-              <a:rPr lang="en-US"/>
+              <a:rPr lang="en-US" smtClean="0"/>
               <a:t>Click to edit Master text styles</a:t>
             </a:r>
           </a:p>
           <a:p>
             <a:pPr lvl="1"/>
             <a:r>
-              <a:rPr lang="en-US"/>
+              <a:rPr lang="en-US" smtClean="0"/>
               <a:t>Second level</a:t>
             </a:r>
           </a:p>
           <a:p>
             <a:pPr lvl="2"/>
             <a:r>
-              <a:rPr lang="en-US"/>
+              <a:rPr lang="en-US" smtClean="0"/>
               <a:t>Third level</a:t>
             </a:r>
           </a:p>
           <a:p>
             <a:pPr lvl="3"/>
             <a:r>
-              <a:rPr lang="en-US"/>
+              <a:rPr lang="en-US" smtClean="0"/>
               <a:t>Fourth level</a:t>
             </a:r>
           </a:p>
           <a:p>
             <a:pPr lvl="4"/>
             <a:r>
-              <a:rPr lang="en-US"/>
+              <a:rPr lang="en-US" smtClean="0"/>
               <a:t>Fifth level</a:t>
             </a:r>
+            <a:endParaRPr lang="en-US"/>
           </a:p>
         </p:txBody>
       </p:sp>
@@ -822,7 +815,7 @@
           <a:p>
             <a:fld id="{5BCAD085-E8A6-8845-BD4E-CB4CCA059FC4}" type="datetimeFigureOut">
               <a:rPr lang="en-US" smtClean="0"/>
-              <a:t>5/29/2026</a:t>
+              <a:t>1/27/13</a:t>
             </a:fld>
             <a:endParaRPr lang="en-US"/>
           </a:p>
@@ -925,9 +918,10 @@
           </a:lstStyle>
           <a:p>
             <a:r>
-              <a:rPr lang="en-US"/>
+              <a:rPr lang="en-US" smtClean="0"/>
               <a:t>Click to edit Master title style</a:t>
             </a:r>
+            <a:endParaRPr lang="en-US"/>
           </a:p>
         </p:txBody>
       </p:sp>
@@ -1044,7 +1038,7 @@
           <a:p>
             <a:pPr lvl="0"/>
             <a:r>
-              <a:rPr lang="en-US"/>
+              <a:rPr lang="en-US" smtClean="0"/>
               <a:t>Click to edit Master text styles</a:t>
             </a:r>
           </a:p>
@@ -1067,7 +1061,7 @@
           <a:p>
             <a:fld id="{5BCAD085-E8A6-8845-BD4E-CB4CCA059FC4}" type="datetimeFigureOut">
               <a:rPr lang="en-US" smtClean="0"/>
-              <a:t>5/29/2026</a:t>
+              <a:t>1/27/13</a:t>
             </a:fld>
             <a:endParaRPr lang="en-US"/>
           </a:p>
@@ -1161,9 +1155,10 @@
           <a:lstStyle/>
           <a:p>
             <a:r>
-              <a:rPr lang="en-US"/>
+              <a:rPr lang="en-US" smtClean="0"/>
               <a:t>Click to edit Master title style</a:t>
             </a:r>
+            <a:endParaRPr lang="en-US"/>
           </a:p>
         </p:txBody>
       </p:sp>
@@ -1217,37 +1212,38 @@
           <a:p>
             <a:pPr lvl="0"/>
             <a:r>
-              <a:rPr lang="en-US"/>
+              <a:rPr lang="en-US" smtClean="0"/>
               <a:t>Click to edit Master text styles</a:t>
             </a:r>
           </a:p>
           <a:p>
             <a:pPr lvl="1"/>
             <a:r>
-              <a:rPr lang="en-US"/>
+              <a:rPr lang="en-US" smtClean="0"/>
               <a:t>Second level</a:t>
             </a:r>
           </a:p>
           <a:p>
             <a:pPr lvl="2"/>
             <a:r>
-              <a:rPr lang="en-US"/>
+              <a:rPr lang="en-US" smtClean="0"/>
               <a:t>Third level</a:t>
             </a:r>
           </a:p>
           <a:p>
             <a:pPr lvl="3"/>
             <a:r>
-              <a:rPr lang="en-US"/>
+              <a:rPr lang="en-US" smtClean="0"/>
               <a:t>Fourth level</a:t>
             </a:r>
           </a:p>
           <a:p>
             <a:pPr lvl="4"/>
             <a:r>
-              <a:rPr lang="en-US"/>
+              <a:rPr lang="en-US" smtClean="0"/>
               <a:t>Fifth level</a:t>
             </a:r>
+            <a:endParaRPr lang="en-US"/>
           </a:p>
         </p:txBody>
       </p:sp>
@@ -1301,37 +1297,38 @@
           <a:p>
             <a:pPr lvl="0"/>
             <a:r>
-              <a:rPr lang="en-US"/>
+              <a:rPr lang="en-US" smtClean="0"/>
               <a:t>Click to edit Master text styles</a:t>
             </a:r>
           </a:p>
           <a:p>
             <a:pPr lvl="1"/>
             <a:r>
-              <a:rPr lang="en-US"/>
+              <a:rPr lang="en-US" smtClean="0"/>
               <a:t>Second level</a:t>
             </a:r>
           </a:p>
           <a:p>
             <a:pPr lvl="2"/>
             <a:r>
-              <a:rPr lang="en-US"/>
+              <a:rPr lang="en-US" smtClean="0"/>
               <a:t>Third level</a:t>
             </a:r>
           </a:p>
           <a:p>
             <a:pPr lvl="3"/>
             <a:r>
-              <a:rPr lang="en-US"/>
+              <a:rPr lang="en-US" smtClean="0"/>
               <a:t>Fourth level</a:t>
             </a:r>
           </a:p>
           <a:p>
             <a:pPr lvl="4"/>
             <a:r>
-              <a:rPr lang="en-US"/>
+              <a:rPr lang="en-US" smtClean="0"/>
               <a:t>Fifth level</a:t>
             </a:r>
+            <a:endParaRPr lang="en-US"/>
           </a:p>
         </p:txBody>
       </p:sp>
@@ -1352,7 +1349,7 @@
           <a:p>
             <a:fld id="{5BCAD085-E8A6-8845-BD4E-CB4CCA059FC4}" type="datetimeFigureOut">
               <a:rPr lang="en-US" smtClean="0"/>
-              <a:t>5/29/2026</a:t>
+              <a:t>1/27/13</a:t>
             </a:fld>
             <a:endParaRPr lang="en-US"/>
           </a:p>
@@ -1450,9 +1447,10 @@
           </a:lstStyle>
           <a:p>
             <a:r>
-              <a:rPr lang="en-US"/>
+              <a:rPr lang="en-US" smtClean="0"/>
               <a:t>Click to edit Master title style</a:t>
             </a:r>
+            <a:endParaRPr lang="en-US"/>
           </a:p>
         </p:txBody>
       </p:sp>
@@ -1515,7 +1513,7 @@
           <a:p>
             <a:pPr lvl="0"/>
             <a:r>
-              <a:rPr lang="en-US"/>
+              <a:rPr lang="en-US" smtClean="0"/>
               <a:t>Click to edit Master text styles</a:t>
             </a:r>
           </a:p>
@@ -1571,37 +1569,38 @@
           <a:p>
             <a:pPr lvl="0"/>
             <a:r>
-              <a:rPr lang="en-US"/>
+              <a:rPr lang="en-US" smtClean="0"/>
               <a:t>Click to edit Master text styles</a:t>
             </a:r>
           </a:p>
           <a:p>
             <a:pPr lvl="1"/>
             <a:r>
-              <a:rPr lang="en-US"/>
+              <a:rPr lang="en-US" smtClean="0"/>
               <a:t>Second level</a:t>
             </a:r>
           </a:p>
           <a:p>
             <a:pPr lvl="2"/>
             <a:r>
-              <a:rPr lang="en-US"/>
+              <a:rPr lang="en-US" smtClean="0"/>
               <a:t>Third level</a:t>
             </a:r>
           </a:p>
           <a:p>
             <a:pPr lvl="3"/>
             <a:r>
-              <a:rPr lang="en-US"/>
+              <a:rPr lang="en-US" smtClean="0"/>
               <a:t>Fourth level</a:t>
             </a:r>
           </a:p>
           <a:p>
             <a:pPr lvl="4"/>
             <a:r>
-              <a:rPr lang="en-US"/>
+              <a:rPr lang="en-US" smtClean="0"/>
               <a:t>Fifth level</a:t>
             </a:r>
+            <a:endParaRPr lang="en-US"/>
           </a:p>
         </p:txBody>
       </p:sp>
@@ -1664,7 +1663,7 @@
           <a:p>
             <a:pPr lvl="0"/>
             <a:r>
-              <a:rPr lang="en-US"/>
+              <a:rPr lang="en-US" smtClean="0"/>
               <a:t>Click to edit Master text styles</a:t>
             </a:r>
           </a:p>
@@ -1720,37 +1719,38 @@
           <a:p>
             <a:pPr lvl="0"/>
             <a:r>
-              <a:rPr lang="en-US"/>
+              <a:rPr lang="en-US" smtClean="0"/>
               <a:t>Click to edit Master text styles</a:t>
             </a:r>
           </a:p>
           <a:p>
             <a:pPr lvl="1"/>
             <a:r>
-              <a:rPr lang="en-US"/>
+              <a:rPr lang="en-US" smtClean="0"/>
               <a:t>Second level</a:t>
             </a:r>
           </a:p>
           <a:p>
             <a:pPr lvl="2"/>
             <a:r>
-              <a:rPr lang="en-US"/>
+              <a:rPr lang="en-US" smtClean="0"/>
               <a:t>Third level</a:t>
             </a:r>
           </a:p>
           <a:p>
             <a:pPr lvl="3"/>
             <a:r>
-              <a:rPr lang="en-US"/>
+              <a:rPr lang="en-US" smtClean="0"/>
               <a:t>Fourth level</a:t>
             </a:r>
           </a:p>
           <a:p>
             <a:pPr lvl="4"/>
             <a:r>
-              <a:rPr lang="en-US"/>
+              <a:rPr lang="en-US" smtClean="0"/>
               <a:t>Fifth level</a:t>
             </a:r>
+            <a:endParaRPr lang="en-US"/>
           </a:p>
         </p:txBody>
       </p:sp>
@@ -1771,7 +1771,7 @@
           <a:p>
             <a:fld id="{5BCAD085-E8A6-8845-BD4E-CB4CCA059FC4}" type="datetimeFigureOut">
               <a:rPr lang="en-US" smtClean="0"/>
-              <a:t>5/29/2026</a:t>
+              <a:t>1/27/13</a:t>
             </a:fld>
             <a:endParaRPr lang="en-US"/>
           </a:p>
@@ -1865,9 +1865,10 @@
           <a:lstStyle/>
           <a:p>
             <a:r>
-              <a:rPr lang="en-US"/>
+              <a:rPr lang="en-US" smtClean="0"/>
               <a:t>Click to edit Master title style</a:t>
             </a:r>
+            <a:endParaRPr lang="en-US"/>
           </a:p>
         </p:txBody>
       </p:sp>
@@ -1888,7 +1889,7 @@
           <a:p>
             <a:fld id="{5BCAD085-E8A6-8845-BD4E-CB4CCA059FC4}" type="datetimeFigureOut">
               <a:rPr lang="en-US" smtClean="0"/>
-              <a:t>5/29/2026</a:t>
+              <a:t>1/27/13</a:t>
             </a:fld>
             <a:endParaRPr lang="en-US"/>
           </a:p>
@@ -1983,7 +1984,7 @@
           <a:p>
             <a:fld id="{5BCAD085-E8A6-8845-BD4E-CB4CCA059FC4}" type="datetimeFigureOut">
               <a:rPr lang="en-US" smtClean="0"/>
-              <a:t>5/29/2026</a:t>
+              <a:t>1/27/13</a:t>
             </a:fld>
             <a:endParaRPr lang="en-US"/>
           </a:p>
@@ -2086,9 +2087,10 @@
           </a:lstStyle>
           <a:p>
             <a:r>
-              <a:rPr lang="en-US"/>
+              <a:rPr lang="en-US" smtClean="0"/>
               <a:t>Click to edit Master title style</a:t>
             </a:r>
+            <a:endParaRPr lang="en-US"/>
           </a:p>
         </p:txBody>
       </p:sp>
@@ -2142,37 +2144,38 @@
           <a:p>
             <a:pPr lvl="0"/>
             <a:r>
-              <a:rPr lang="en-US"/>
+              <a:rPr lang="en-US" smtClean="0"/>
               <a:t>Click to edit Master text styles</a:t>
             </a:r>
           </a:p>
           <a:p>
             <a:pPr lvl="1"/>
             <a:r>
-              <a:rPr lang="en-US"/>
+              <a:rPr lang="en-US" smtClean="0"/>
               <a:t>Second level</a:t>
             </a:r>
           </a:p>
           <a:p>
             <a:pPr lvl="2"/>
             <a:r>
-              <a:rPr lang="en-US"/>
+              <a:rPr lang="en-US" smtClean="0"/>
               <a:t>Third level</a:t>
             </a:r>
           </a:p>
           <a:p>
             <a:pPr lvl="3"/>
             <a:r>
-              <a:rPr lang="en-US"/>
+              <a:rPr lang="en-US" smtClean="0"/>
               <a:t>Fourth level</a:t>
             </a:r>
           </a:p>
           <a:p>
             <a:pPr lvl="4"/>
             <a:r>
-              <a:rPr lang="en-US"/>
+              <a:rPr lang="en-US" smtClean="0"/>
               <a:t>Fifth level</a:t>
             </a:r>
+            <a:endParaRPr lang="en-US"/>
           </a:p>
         </p:txBody>
       </p:sp>
@@ -2235,7 +2238,7 @@
           <a:p>
             <a:pPr lvl="0"/>
             <a:r>
-              <a:rPr lang="en-US"/>
+              <a:rPr lang="en-US" smtClean="0"/>
               <a:t>Click to edit Master text styles</a:t>
             </a:r>
           </a:p>
@@ -2258,7 +2261,7 @@
           <a:p>
             <a:fld id="{5BCAD085-E8A6-8845-BD4E-CB4CCA059FC4}" type="datetimeFigureOut">
               <a:rPr lang="en-US" smtClean="0"/>
-              <a:t>5/29/2026</a:t>
+              <a:t>1/27/13</a:t>
             </a:fld>
             <a:endParaRPr lang="en-US"/>
           </a:p>
@@ -2361,9 +2364,10 @@
           </a:lstStyle>
           <a:p>
             <a:r>
-              <a:rPr lang="en-US"/>
+              <a:rPr lang="en-US" smtClean="0"/>
               <a:t>Click to edit Master title style</a:t>
             </a:r>
+            <a:endParaRPr lang="en-US"/>
           </a:p>
         </p:txBody>
       </p:sp>
@@ -2487,7 +2491,7 @@
           <a:p>
             <a:pPr lvl="0"/>
             <a:r>
-              <a:rPr lang="en-US"/>
+              <a:rPr lang="en-US" smtClean="0"/>
               <a:t>Click to edit Master text styles</a:t>
             </a:r>
           </a:p>
@@ -2510,7 +2514,7 @@
           <a:p>
             <a:fld id="{5BCAD085-E8A6-8845-BD4E-CB4CCA059FC4}" type="datetimeFigureOut">
               <a:rPr lang="en-US" smtClean="0"/>
-              <a:t>5/29/2026</a:t>
+              <a:t>1/27/13</a:t>
             </a:fld>
             <a:endParaRPr lang="en-US"/>
           </a:p>
@@ -2619,9 +2623,10 @@
           <a:lstStyle/>
           <a:p>
             <a:r>
-              <a:rPr lang="en-US"/>
+              <a:rPr lang="en-US" smtClean="0"/>
               <a:t>Click to edit Master title style</a:t>
             </a:r>
+            <a:endParaRPr lang="en-US"/>
           </a:p>
         </p:txBody>
       </p:sp>
@@ -2652,37 +2657,38 @@
           <a:p>
             <a:pPr lvl="0"/>
             <a:r>
-              <a:rPr lang="en-US"/>
+              <a:rPr lang="en-US" smtClean="0"/>
               <a:t>Click to edit Master text styles</a:t>
             </a:r>
           </a:p>
           <a:p>
             <a:pPr lvl="1"/>
             <a:r>
-              <a:rPr lang="en-US"/>
+              <a:rPr lang="en-US" smtClean="0"/>
               <a:t>Second level</a:t>
             </a:r>
           </a:p>
           <a:p>
             <a:pPr lvl="2"/>
             <a:r>
-              <a:rPr lang="en-US"/>
+              <a:rPr lang="en-US" smtClean="0"/>
               <a:t>Third level</a:t>
             </a:r>
           </a:p>
           <a:p>
             <a:pPr lvl="3"/>
             <a:r>
-              <a:rPr lang="en-US"/>
+              <a:rPr lang="en-US" smtClean="0"/>
               <a:t>Fourth level</a:t>
             </a:r>
           </a:p>
           <a:p>
             <a:pPr lvl="4"/>
             <a:r>
-              <a:rPr lang="en-US"/>
+              <a:rPr lang="en-US" smtClean="0"/>
               <a:t>Fifth level</a:t>
             </a:r>
+            <a:endParaRPr lang="en-US"/>
           </a:p>
         </p:txBody>
       </p:sp>
@@ -2721,7 +2727,7 @@
           <a:p>
             <a:fld id="{5BCAD085-E8A6-8845-BD4E-CB4CCA059FC4}" type="datetimeFigureOut">
               <a:rPr lang="en-US" smtClean="0"/>
-              <a:t>5/29/2026</a:t>
+              <a:t>1/27/13</a:t>
             </a:fld>
             <a:endParaRPr lang="en-US"/>
           </a:p>
@@ -3080,7 +3086,7 @@
 </file>
 
 <file path=ppt/slides/slide1.xml><?xml version="1.0" encoding="utf-8"?>
-<p:sld xmlns:a="http://schemas.openxmlformats.org/drawingml/2006/main" xmlns:r="http://schemas.openxmlformats.org/officeDocument/2006/relationships" xmlns:p="http://schemas.openxmlformats.org/presentationml/2006/main">
+<p:sld xmlns:a="http://schemas.openxmlformats.org/drawingml/2006/main" xmlns:p="http://schemas.openxmlformats.org/presentationml/2006/main" xmlns:r="http://schemas.openxmlformats.org/officeDocument/2006/relationships">
   <p:cSld>
     <p:bg>
       <p:bgPr>
@@ -3096,14 +3102,7 @@
         <p:cNvGrpSpPr/>
         <p:nvPr/>
       </p:nvGrpSpPr>
-      <p:grpSpPr>
-        <a:xfrm>
-          <a:off x="0" y="0"/>
-          <a:ext cx="0" cy="0"/>
-          <a:chOff x="0" y="0"/>
-          <a:chExt cx="0" cy="0"/>
-        </a:xfrm>
-      </p:grpSpPr>
+      <p:grpSpPr/>
       <p:sp>
         <p:nvSpPr>
           <p:cNvPr id="2" name="Rectangle 1"/>
@@ -3144,7 +3143,6 @@
           <a:lstStyle/>
           <a:p>
             <a:pPr algn="ctr"/>
-            <a:endParaRPr/>
           </a:p>
         </p:txBody>
       </p:sp>
@@ -3222,7 +3220,6 @@
           <a:lstStyle/>
           <a:p>
             <a:pPr algn="ctr"/>
-            <a:endParaRPr/>
           </a:p>
         </p:txBody>
       </p:sp>
@@ -3334,7 +3331,6 @@
           <a:lstStyle/>
           <a:p>
             <a:pPr algn="ctr"/>
-            <a:endParaRPr/>
           </a:p>
         </p:txBody>
       </p:sp>
@@ -3406,96 +3402,6 @@
           </a:p>
         </p:txBody>
       </p:sp>
-      <p:pic>
-        <p:nvPicPr>
-          <p:cNvPr id="11" name="Picture 10">
-            <a:extLst>
-              <a:ext uri="{FF2B5EF4-FFF2-40B4-BE49-F238E27FC236}">
-                <a16:creationId xmlns:a16="http://schemas.microsoft.com/office/drawing/2014/main" id="{1FAB55F8-3701-48B2-98C6-1144D3E3A889}"/>
-              </a:ext>
-            </a:extLst>
-          </p:cNvPr>
-          <p:cNvPicPr>
-            <a:picLocks noChangeAspect="1"/>
-          </p:cNvPicPr>
-          <p:nvPr/>
-        </p:nvPicPr>
-        <p:blipFill>
-          <a:blip r:embed="rId2"/>
-          <a:stretch>
-            <a:fillRect/>
-          </a:stretch>
-        </p:blipFill>
-        <p:spPr>
-          <a:xfrm>
-            <a:off x="10266976" y="4464227"/>
-            <a:ext cx="1503087" cy="946625"/>
-          </a:xfrm>
-          <a:prstGeom prst="rect">
-            <a:avLst/>
-          </a:prstGeom>
-        </p:spPr>
-      </p:pic>
-      <p:pic>
-        <p:nvPicPr>
-          <p:cNvPr id="13" name="Picture 12">
-            <a:extLst>
-              <a:ext uri="{FF2B5EF4-FFF2-40B4-BE49-F238E27FC236}">
-                <a16:creationId xmlns:a16="http://schemas.microsoft.com/office/drawing/2014/main" id="{F1C14C37-2A0F-8893-3738-F6DCFF3315FF}"/>
-              </a:ext>
-            </a:extLst>
-          </p:cNvPr>
-          <p:cNvPicPr>
-            <a:picLocks noChangeAspect="1"/>
-          </p:cNvPicPr>
-          <p:nvPr/>
-        </p:nvPicPr>
-        <p:blipFill>
-          <a:blip r:embed="rId3"/>
-          <a:stretch>
-            <a:fillRect/>
-          </a:stretch>
-        </p:blipFill>
-        <p:spPr>
-          <a:xfrm>
-            <a:off x="8287559" y="4701072"/>
-            <a:ext cx="1588011" cy="432817"/>
-          </a:xfrm>
-          <a:prstGeom prst="rect">
-            <a:avLst/>
-          </a:prstGeom>
-        </p:spPr>
-      </p:pic>
-      <p:pic>
-        <p:nvPicPr>
-          <p:cNvPr id="15" name="Picture 14">
-            <a:extLst>
-              <a:ext uri="{FF2B5EF4-FFF2-40B4-BE49-F238E27FC236}">
-                <a16:creationId xmlns:a16="http://schemas.microsoft.com/office/drawing/2014/main" id="{AD9E8BEE-DAB2-177E-A6E6-32FA15D56152}"/>
-              </a:ext>
-            </a:extLst>
-          </p:cNvPr>
-          <p:cNvPicPr>
-            <a:picLocks noChangeAspect="1"/>
-          </p:cNvPicPr>
-          <p:nvPr/>
-        </p:nvPicPr>
-        <p:blipFill>
-          <a:blip r:embed="rId4"/>
-          <a:stretch>
-            <a:fillRect/>
-          </a:stretch>
-        </p:blipFill>
-        <p:spPr>
-          <a:xfrm>
-            <a:off x="6728286" y="4559636"/>
-            <a:ext cx="1073535" cy="715690"/>
-          </a:xfrm>
-          <a:prstGeom prst="rect">
-            <a:avLst/>
-          </a:prstGeom>
-        </p:spPr>
-      </p:pic>
     </p:spTree>
   </p:cSld>
   <p:clrMapOvr>
@@ -3505,7 +3411,7 @@
 </file>
 
 <file path=ppt/slides/slide2.xml><?xml version="1.0" encoding="utf-8"?>
-<p:sld xmlns:a="http://schemas.openxmlformats.org/drawingml/2006/main" xmlns:r="http://schemas.openxmlformats.org/officeDocument/2006/relationships" xmlns:p="http://schemas.openxmlformats.org/presentationml/2006/main">
+<p:sld xmlns:a="http://schemas.openxmlformats.org/drawingml/2006/main" xmlns:p="http://schemas.openxmlformats.org/presentationml/2006/main" xmlns:r="http://schemas.openxmlformats.org/officeDocument/2006/relationships">
   <p:cSld>
     <p:bg>
       <p:bgPr>
@@ -3521,14 +3427,7 @@
         <p:cNvGrpSpPr/>
         <p:nvPr/>
       </p:nvGrpSpPr>
-      <p:grpSpPr>
-        <a:xfrm>
-          <a:off x="0" y="0"/>
-          <a:ext cx="0" cy="0"/>
-          <a:chOff x="0" y="0"/>
-          <a:chExt cx="0" cy="0"/>
-        </a:xfrm>
-      </p:grpSpPr>
+      <p:grpSpPr/>
       <p:sp>
         <p:nvSpPr>
           <p:cNvPr id="2" name="Rectangle 1"/>
@@ -3569,7 +3468,6 @@
           <a:lstStyle/>
           <a:p>
             <a:pPr algn="ctr"/>
-            <a:endParaRPr/>
           </a:p>
         </p:txBody>
       </p:sp>
@@ -3631,44 +3529,12 @@
           <a:p>
             <a:pPr algn="l"/>
             <a:r>
-              <a:rPr sz="3000" b="1" i="0" dirty="0">
+              <a:rPr sz="3000" b="1" i="0">
                 <a:solidFill>
                   <a:srgbClr val="FFFFFF"/>
                 </a:solidFill>
               </a:rPr>
-              <a:t>Le </a:t>
-            </a:r>
-            <a:r>
-              <a:rPr sz="3000" b="1" i="0" dirty="0" err="1">
-                <a:solidFill>
-                  <a:srgbClr val="FFFFFF"/>
-                </a:solidFill>
-              </a:rPr>
-              <a:t>nord</a:t>
-            </a:r>
-            <a:r>
-              <a:rPr sz="3000" b="1" i="0" dirty="0">
-                <a:solidFill>
-                  <a:srgbClr val="FFFFFF"/>
-                </a:solidFill>
-              </a:rPr>
-              <a:t> du </a:t>
-            </a:r>
-            <a:r>
-              <a:rPr sz="3000" b="1" i="0" dirty="0" err="1">
-                <a:solidFill>
-                  <a:srgbClr val="FFFFFF"/>
-                </a:solidFill>
-              </a:rPr>
-              <a:t>Bénin</a:t>
-            </a:r>
-            <a:r>
-              <a:rPr sz="3000" b="1" i="0" dirty="0">
-                <a:solidFill>
-                  <a:srgbClr val="FFFFFF"/>
-                </a:solidFill>
-              </a:rPr>
-              <a:t> est sous tension.
+              <a:t>Le nord du Bénin est sous tension.
 Personne ne le surveille.</a:t>
             </a:r>
           </a:p>
@@ -3714,7 +3580,6 @@
           <a:lstStyle/>
           <a:p>
             <a:pPr algn="ctr"/>
-            <a:endParaRPr/>
           </a:p>
         </p:txBody>
       </p:sp>
@@ -3836,7 +3701,6 @@
           <a:lstStyle/>
           <a:p>
             <a:pPr algn="ctr"/>
-            <a:endParaRPr/>
           </a:p>
         </p:txBody>
       </p:sp>
@@ -3938,7 +3802,7 @@
 </file>
 
 <file path=ppt/slides/slide3.xml><?xml version="1.0" encoding="utf-8"?>
-<p:sld xmlns:a="http://schemas.openxmlformats.org/drawingml/2006/main" xmlns:r="http://schemas.openxmlformats.org/officeDocument/2006/relationships" xmlns:p="http://schemas.openxmlformats.org/presentationml/2006/main">
+<p:sld xmlns:a="http://schemas.openxmlformats.org/drawingml/2006/main" xmlns:p="http://schemas.openxmlformats.org/presentationml/2006/main" xmlns:r="http://schemas.openxmlformats.org/officeDocument/2006/relationships">
   <p:cSld>
     <p:bg>
       <p:bgPr>
@@ -3954,14 +3818,7 @@
         <p:cNvGrpSpPr/>
         <p:nvPr/>
       </p:nvGrpSpPr>
-      <p:grpSpPr>
-        <a:xfrm>
-          <a:off x="0" y="0"/>
-          <a:ext cx="0" cy="0"/>
-          <a:chOff x="0" y="0"/>
-          <a:chExt cx="0" cy="0"/>
-        </a:xfrm>
-      </p:grpSpPr>
+      <p:grpSpPr/>
       <p:sp>
         <p:nvSpPr>
           <p:cNvPr id="2" name="Rectangle 1"/>
@@ -4002,7 +3859,6 @@
           <a:lstStyle/>
           <a:p>
             <a:pPr algn="ctr"/>
-            <a:endParaRPr/>
           </a:p>
         </p:txBody>
       </p:sp>
@@ -4114,7 +3970,6 @@
           <a:lstStyle/>
           <a:p>
             <a:pPr algn="ctr"/>
-            <a:endParaRPr/>
           </a:p>
         </p:txBody>
       </p:sp>
@@ -4158,7 +4013,6 @@
           <a:lstStyle/>
           <a:p>
             <a:pPr algn="ctr"/>
-            <a:endParaRPr/>
           </a:p>
         </p:txBody>
       </p:sp>
@@ -4304,7 +4158,6 @@
           <a:lstStyle/>
           <a:p>
             <a:pPr algn="ctr"/>
-            <a:endParaRPr/>
           </a:p>
         </p:txBody>
       </p:sp>
@@ -4450,7 +4303,6 @@
           <a:lstStyle/>
           <a:p>
             <a:pPr algn="ctr"/>
-            <a:endParaRPr/>
           </a:p>
         </p:txBody>
       </p:sp>
@@ -4565,7 +4417,7 @@
 </file>
 
 <file path=ppt/slides/slide4.xml><?xml version="1.0" encoding="utf-8"?>
-<p:sld xmlns:a="http://schemas.openxmlformats.org/drawingml/2006/main" xmlns:r="http://schemas.openxmlformats.org/officeDocument/2006/relationships" xmlns:p="http://schemas.openxmlformats.org/presentationml/2006/main">
+<p:sld xmlns:a="http://schemas.openxmlformats.org/drawingml/2006/main" xmlns:p="http://schemas.openxmlformats.org/presentationml/2006/main" xmlns:r="http://schemas.openxmlformats.org/officeDocument/2006/relationships">
   <p:cSld>
     <p:bg>
       <p:bgPr>
@@ -4581,33 +4433,130 @@
         <p:cNvGrpSpPr/>
         <p:nvPr/>
       </p:nvGrpSpPr>
-      <p:grpSpPr>
-        <a:xfrm>
-          <a:off x="0" y="0"/>
-          <a:ext cx="0" cy="0"/>
-          <a:chOff x="0" y="0"/>
-          <a:chExt cx="0" cy="0"/>
-        </a:xfrm>
-      </p:grpSpPr>
-      <p:sp>
-        <p:nvSpPr>
-          <p:cNvPr id="2" name="Rectangle 1"/>
+      <p:grpSpPr/>
+      <p:sp>
+        <p:nvSpPr>
+          <p:cNvPr id="2" name="TextBox 1"/>
+          <p:cNvSpPr txBox="1"/>
+          <p:nvPr/>
+        </p:nvSpPr>
+        <p:spPr>
+          <a:xfrm>
+            <a:off x="11475720" y="6565392"/>
+            <a:ext cx="594360" cy="201168"/>
+          </a:xfrm>
+          <a:prstGeom prst="rect">
+            <a:avLst/>
+          </a:prstGeom>
+          <a:noFill/>
+        </p:spPr>
+        <p:txBody>
+          <a:bodyPr wrap="square">
+            <a:spAutoFit/>
+          </a:bodyPr>
+          <a:lstStyle/>
+          <a:p>
+            <a:pPr algn="r"/>
+            <a:r>
+              <a:rPr sz="900" b="0" i="0">
+                <a:solidFill>
+                  <a:srgbClr val="64748B"/>
+                </a:solidFill>
+              </a:rPr>
+              <a:t>4 / 8</a:t>
+            </a:r>
+          </a:p>
+        </p:txBody>
+      </p:sp>
+      <p:sp>
+        <p:nvSpPr>
+          <p:cNvPr id="3" name="TextBox 2"/>
+          <p:cNvSpPr txBox="1"/>
+          <p:nvPr/>
+        </p:nvSpPr>
+        <p:spPr>
+          <a:xfrm>
+            <a:off x="457200" y="182880"/>
+            <a:ext cx="8229600" cy="594360"/>
+          </a:xfrm>
+          <a:prstGeom prst="rect">
+            <a:avLst/>
+          </a:prstGeom>
+          <a:noFill/>
+        </p:spPr>
+        <p:txBody>
+          <a:bodyPr wrap="square">
+            <a:spAutoFit/>
+          </a:bodyPr>
+          <a:lstStyle/>
+          <a:p>
+            <a:pPr algn="l"/>
+            <a:r>
+              <a:rPr sz="2400" b="1" i="0">
+                <a:solidFill>
+                  <a:srgbClr val="FFFFFF"/>
+                </a:solidFill>
+              </a:rPr>
+              <a:t>La carte live.</a:t>
+            </a:r>
+          </a:p>
+        </p:txBody>
+      </p:sp>
+      <p:sp>
+        <p:nvSpPr>
+          <p:cNvPr id="4" name="TextBox 3"/>
+          <p:cNvSpPr txBox="1"/>
+          <p:nvPr/>
+        </p:nvSpPr>
+        <p:spPr>
+          <a:xfrm>
+            <a:off x="457200" y="804672"/>
+            <a:ext cx="8229600" cy="365760"/>
+          </a:xfrm>
+          <a:prstGeom prst="rect">
+            <a:avLst/>
+          </a:prstGeom>
+          <a:noFill/>
+        </p:spPr>
+        <p:txBody>
+          <a:bodyPr wrap="square">
+            <a:spAutoFit/>
+          </a:bodyPr>
+          <a:lstStyle/>
+          <a:p>
+            <a:pPr algn="l"/>
+            <a:r>
+              <a:rPr sz="1300" b="0" i="0">
+                <a:solidFill>
+                  <a:srgbClr val="64748B"/>
+                </a:solidFill>
+              </a:rPr>
+              <a:t>GDELT · Signalements terrain · Temps réel</a:t>
+            </a:r>
+          </a:p>
+        </p:txBody>
+      </p:sp>
+      <p:sp>
+        <p:nvSpPr>
+          <p:cNvPr id="5" name="Rectangle 4"/>
           <p:cNvSpPr/>
           <p:nvPr/>
         </p:nvSpPr>
         <p:spPr>
           <a:xfrm>
-            <a:off x="0" y="0"/>
-            <a:ext cx="82296" cy="6858000"/>
+            <a:off x="365760" y="1325880"/>
+            <a:ext cx="11430000" cy="5120640"/>
           </a:xfrm>
           <a:prstGeom prst="rect">
             <a:avLst/>
           </a:prstGeom>
           <a:solidFill>
-            <a:srgbClr val="059669"/>
+            <a:srgbClr val="161E2E"/>
           </a:solidFill>
-          <a:ln>
-            <a:noFill/>
+          <a:ln w="12700">
+            <a:solidFill>
+              <a:srgbClr val="384A5E"/>
+            </a:solidFill>
           </a:ln>
         </p:spPr>
         <p:style>
@@ -4629,20 +4578,19 @@
           <a:lstStyle/>
           <a:p>
             <a:pPr algn="ctr"/>
-            <a:endParaRPr/>
-          </a:p>
-        </p:txBody>
-      </p:sp>
-      <p:sp>
-        <p:nvSpPr>
-          <p:cNvPr id="3" name="TextBox 2"/>
+          </a:p>
+        </p:txBody>
+      </p:sp>
+      <p:sp>
+        <p:nvSpPr>
+          <p:cNvPr id="6" name="TextBox 5"/>
           <p:cNvSpPr txBox="1"/>
           <p:nvPr/>
         </p:nvSpPr>
         <p:spPr>
           <a:xfrm>
-            <a:off x="11475720" y="6565392"/>
-            <a:ext cx="594360" cy="201168"/>
+            <a:off x="640080" y="3337560"/>
+            <a:ext cx="10881360" cy="365760"/>
           </a:xfrm>
           <a:prstGeom prst="rect">
             <a:avLst/>
@@ -4655,28 +4603,28 @@
           </a:bodyPr>
           <a:lstStyle/>
           <a:p>
-            <a:pPr algn="r"/>
-            <a:r>
-              <a:rPr sz="900" b="0" i="0">
-                <a:solidFill>
-                  <a:srgbClr val="64748B"/>
-                </a:solidFill>
-              </a:rPr>
-              <a:t>7 / 8</a:t>
-            </a:r>
-          </a:p>
-        </p:txBody>
-      </p:sp>
-      <p:sp>
-        <p:nvSpPr>
-          <p:cNvPr id="4" name="TextBox 3"/>
+            <a:pPr algn="ctr"/>
+            <a:r>
+              <a:rPr sz="1100" b="0" i="0">
+                <a:solidFill>
+                  <a:srgbClr val="384A5E"/>
+                </a:solidFill>
+              </a:rPr>
+              <a:t>[ CAPTURE À INSÉRER ]</a:t>
+            </a:r>
+          </a:p>
+        </p:txBody>
+      </p:sp>
+      <p:sp>
+        <p:nvSpPr>
+          <p:cNvPr id="7" name="TextBox 6"/>
           <p:cNvSpPr txBox="1"/>
           <p:nvPr/>
         </p:nvSpPr>
         <p:spPr>
           <a:xfrm>
-            <a:off x="502920" y="365760"/>
-            <a:ext cx="10972800" cy="731520"/>
+            <a:off x="640080" y="3749039"/>
+            <a:ext cx="10881360" cy="411480"/>
           </a:xfrm>
           <a:prstGeom prst="rect">
             <a:avLst/>
@@ -4689,116 +4637,28 @@
           </a:bodyPr>
           <a:lstStyle/>
           <a:p>
-            <a:pPr algn="l"/>
-            <a:r>
-              <a:rPr sz="3000" b="1" i="0">
-                <a:solidFill>
-                  <a:srgbClr val="FFFFFF"/>
-                </a:solidFill>
-              </a:rPr>
-              <a:t>TERROIR surveille. Vous décidez.</a:t>
-            </a:r>
-          </a:p>
-        </p:txBody>
-      </p:sp>
-      <p:sp>
-        <p:nvSpPr>
-          <p:cNvPr id="5" name="Rectangle 4"/>
-          <p:cNvSpPr/>
-          <p:nvPr/>
-        </p:nvSpPr>
-        <p:spPr>
-          <a:xfrm>
-            <a:off x="502920" y="1170432"/>
-            <a:ext cx="1005840" cy="45720"/>
-          </a:xfrm>
-          <a:prstGeom prst="rect">
-            <a:avLst/>
-          </a:prstGeom>
-          <a:solidFill>
-            <a:srgbClr val="059669"/>
-          </a:solidFill>
-          <a:ln>
-            <a:noFill/>
-          </a:ln>
-        </p:spPr>
-        <p:style>
-          <a:lnRef idx="1">
-            <a:schemeClr val="accent1"/>
-          </a:lnRef>
-          <a:fillRef idx="3">
-            <a:schemeClr val="accent1"/>
-          </a:fillRef>
-          <a:effectRef idx="2">
-            <a:schemeClr val="accent1"/>
-          </a:effectRef>
-          <a:fontRef idx="minor">
-            <a:schemeClr val="lt1"/>
-          </a:fontRef>
-        </p:style>
-        <p:txBody>
-          <a:bodyPr rtlCol="0" anchor="ctr"/>
-          <a:lstStyle/>
-          <a:p>
             <a:pPr algn="ctr"/>
-            <a:endParaRPr/>
-          </a:p>
-        </p:txBody>
-      </p:sp>
-      <p:sp>
-        <p:nvSpPr>
-          <p:cNvPr id="6" name="Rectangle 5"/>
-          <p:cNvSpPr/>
-          <p:nvPr/>
-        </p:nvSpPr>
-        <p:spPr>
-          <a:xfrm>
-            <a:off x="502920" y="1554480"/>
-            <a:ext cx="91440" cy="1371600"/>
-          </a:xfrm>
-          <a:prstGeom prst="rect">
-            <a:avLst/>
-          </a:prstGeom>
-          <a:solidFill>
-            <a:srgbClr val="059669"/>
-          </a:solidFill>
-          <a:ln>
-            <a:noFill/>
-          </a:ln>
-        </p:spPr>
-        <p:style>
-          <a:lnRef idx="1">
-            <a:schemeClr val="accent1"/>
-          </a:lnRef>
-          <a:fillRef idx="3">
-            <a:schemeClr val="accent1"/>
-          </a:fillRef>
-          <a:effectRef idx="2">
-            <a:schemeClr val="accent1"/>
-          </a:effectRef>
-          <a:fontRef idx="minor">
-            <a:schemeClr val="lt1"/>
-          </a:fontRef>
-        </p:style>
-        <p:txBody>
-          <a:bodyPr rtlCol="0" anchor="ctr"/>
-          <a:lstStyle/>
-          <a:p>
-            <a:pPr algn="ctr"/>
-            <a:endParaRPr/>
-          </a:p>
-        </p:txBody>
-      </p:sp>
-      <p:sp>
-        <p:nvSpPr>
-          <p:cNvPr id="7" name="TextBox 6"/>
+            <a:r>
+              <a:rPr sz="1300" b="1" i="0">
+                <a:solidFill>
+                  <a:srgbClr val="64748B"/>
+                </a:solidFill>
+              </a:rPr>
+              <a:t>Carte Live — terroir.up.railway.app/#/live</a:t>
+            </a:r>
+          </a:p>
+        </p:txBody>
+      </p:sp>
+      <p:sp>
+        <p:nvSpPr>
+          <p:cNvPr id="8" name="TextBox 7"/>
           <p:cNvSpPr txBox="1"/>
           <p:nvPr/>
         </p:nvSpPr>
         <p:spPr>
           <a:xfrm>
-            <a:off x="713232" y="1600200"/>
-            <a:ext cx="10972800" cy="502920"/>
+            <a:off x="640080" y="4206240"/>
+            <a:ext cx="10881360" cy="457200"/>
           </a:xfrm>
           <a:prstGeom prst="rect">
             <a:avLst/>
@@ -4811,28 +4671,28 @@
           </a:bodyPr>
           <a:lstStyle/>
           <a:p>
-            <a:pPr algn="l"/>
-            <a:r>
-              <a:rPr sz="1800" b="1" i="0">
-                <a:solidFill>
-                  <a:srgbClr val="FFFFFF"/>
-                </a:solidFill>
-              </a:rPr>
-              <a:t>Signal avant l'incident — pas après.</a:t>
-            </a:r>
-          </a:p>
-        </p:txBody>
-      </p:sp>
-      <p:sp>
-        <p:nvSpPr>
-          <p:cNvPr id="8" name="TextBox 7"/>
+            <a:pPr algn="ctr"/>
+            <a:r>
+              <a:rPr sz="1000" b="0" i="1">
+                <a:solidFill>
+                  <a:srgbClr val="64748B"/>
+                </a:solidFill>
+              </a:rPr>
+              <a:t>Montrer : carte Bénin · marqueurs GDELT · signalements citoyens · interface visible</a:t>
+            </a:r>
+          </a:p>
+        </p:txBody>
+      </p:sp>
+      <p:sp>
+        <p:nvSpPr>
+          <p:cNvPr id="9" name="TextBox 8"/>
           <p:cNvSpPr txBox="1"/>
           <p:nvPr/>
         </p:nvSpPr>
         <p:spPr>
           <a:xfrm>
-            <a:off x="713232" y="2148840"/>
-            <a:ext cx="10972800" cy="685800"/>
+            <a:off x="457200" y="6510528"/>
+            <a:ext cx="8229600" cy="256032"/>
           </a:xfrm>
           <a:prstGeom prst="rect">
             <a:avLst/>
@@ -4847,236 +4707,12 @@
           <a:p>
             <a:pPr algn="l"/>
             <a:r>
-              <a:rPr sz="1300" b="0" i="0">
-                <a:solidFill>
-                  <a:srgbClr val="64748B"/>
-                </a:solidFill>
-              </a:rPr>
-              <a:t>ACLED documente. TERROIR détecte les précurseurs médiatiques dans la fenêtre pré-incident. Ces deux approches sont complémentaires.</a:t>
-            </a:r>
-          </a:p>
-        </p:txBody>
-      </p:sp>
-      <p:sp>
-        <p:nvSpPr>
-          <p:cNvPr id="9" name="Rectangle 8"/>
-          <p:cNvSpPr/>
-          <p:nvPr/>
-        </p:nvSpPr>
-        <p:spPr>
-          <a:xfrm>
-            <a:off x="502920" y="3154680"/>
-            <a:ext cx="91440" cy="1371600"/>
-          </a:xfrm>
-          <a:prstGeom prst="rect">
-            <a:avLst/>
-          </a:prstGeom>
-          <a:solidFill>
-            <a:srgbClr val="22D3EE"/>
-          </a:solidFill>
-          <a:ln>
-            <a:noFill/>
-          </a:ln>
-        </p:spPr>
-        <p:style>
-          <a:lnRef idx="1">
-            <a:schemeClr val="accent1"/>
-          </a:lnRef>
-          <a:fillRef idx="3">
-            <a:schemeClr val="accent1"/>
-          </a:fillRef>
-          <a:effectRef idx="2">
-            <a:schemeClr val="accent1"/>
-          </a:effectRef>
-          <a:fontRef idx="minor">
-            <a:schemeClr val="lt1"/>
-          </a:fontRef>
-        </p:style>
-        <p:txBody>
-          <a:bodyPr rtlCol="0" anchor="ctr"/>
-          <a:lstStyle/>
-          <a:p>
-            <a:pPr algn="ctr"/>
-            <a:endParaRPr/>
-          </a:p>
-        </p:txBody>
-      </p:sp>
-      <p:sp>
-        <p:nvSpPr>
-          <p:cNvPr id="10" name="TextBox 9"/>
-          <p:cNvSpPr txBox="1"/>
-          <p:nvPr/>
-        </p:nvSpPr>
-        <p:spPr>
-          <a:xfrm>
-            <a:off x="713232" y="3200400"/>
-            <a:ext cx="10972800" cy="502920"/>
-          </a:xfrm>
-          <a:prstGeom prst="rect">
-            <a:avLst/>
-          </a:prstGeom>
-          <a:noFill/>
-        </p:spPr>
-        <p:txBody>
-          <a:bodyPr wrap="square">
-            <a:spAutoFit/>
-          </a:bodyPr>
-          <a:lstStyle/>
-          <a:p>
-            <a:pPr algn="l"/>
-            <a:r>
-              <a:rPr sz="1800" b="1" i="0">
-                <a:solidFill>
-                  <a:srgbClr val="FFFFFF"/>
-                </a:solidFill>
-              </a:rPr>
-              <a:t>Médias internationaux + terrain combinés.</a:t>
-            </a:r>
-          </a:p>
-        </p:txBody>
-      </p:sp>
-      <p:sp>
-        <p:nvSpPr>
-          <p:cNvPr id="11" name="TextBox 10"/>
-          <p:cNvSpPr txBox="1"/>
-          <p:nvPr/>
-        </p:nvSpPr>
-        <p:spPr>
-          <a:xfrm>
-            <a:off x="713232" y="3749040"/>
-            <a:ext cx="10972800" cy="685800"/>
-          </a:xfrm>
-          <a:prstGeom prst="rect">
-            <a:avLst/>
-          </a:prstGeom>
-          <a:noFill/>
-        </p:spPr>
-        <p:txBody>
-          <a:bodyPr wrap="square">
-            <a:spAutoFit/>
-          </a:bodyPr>
-          <a:lstStyle/>
-          <a:p>
-            <a:pPr algn="l"/>
-            <a:r>
-              <a:rPr sz="1300" b="0" i="0">
-                <a:solidFill>
-                  <a:srgbClr val="64748B"/>
-                </a:solidFill>
-              </a:rPr>
-              <a:t>GDELT capte ce que les médias couvrent. Le signalement citoyen GPS corrige le biais géographique. Ni l'un ni l'autre seul ne suffit.</a:t>
-            </a:r>
-          </a:p>
-        </p:txBody>
-      </p:sp>
-      <p:sp>
-        <p:nvSpPr>
-          <p:cNvPr id="12" name="Rectangle 11"/>
-          <p:cNvSpPr/>
-          <p:nvPr/>
-        </p:nvSpPr>
-        <p:spPr>
-          <a:xfrm>
-            <a:off x="502920" y="4754880"/>
-            <a:ext cx="91440" cy="1371600"/>
-          </a:xfrm>
-          <a:prstGeom prst="rect">
-            <a:avLst/>
-          </a:prstGeom>
-          <a:solidFill>
-            <a:srgbClr val="F59E0B"/>
-          </a:solidFill>
-          <a:ln>
-            <a:noFill/>
-          </a:ln>
-        </p:spPr>
-        <p:style>
-          <a:lnRef idx="1">
-            <a:schemeClr val="accent1"/>
-          </a:lnRef>
-          <a:fillRef idx="3">
-            <a:schemeClr val="accent1"/>
-          </a:fillRef>
-          <a:effectRef idx="2">
-            <a:schemeClr val="accent1"/>
-          </a:effectRef>
-          <a:fontRef idx="minor">
-            <a:schemeClr val="lt1"/>
-          </a:fontRef>
-        </p:style>
-        <p:txBody>
-          <a:bodyPr rtlCol="0" anchor="ctr"/>
-          <a:lstStyle/>
-          <a:p>
-            <a:pPr algn="ctr"/>
-            <a:endParaRPr/>
-          </a:p>
-        </p:txBody>
-      </p:sp>
-      <p:sp>
-        <p:nvSpPr>
-          <p:cNvPr id="13" name="TextBox 12"/>
-          <p:cNvSpPr txBox="1"/>
-          <p:nvPr/>
-        </p:nvSpPr>
-        <p:spPr>
-          <a:xfrm>
-            <a:off x="713232" y="4800600"/>
-            <a:ext cx="10972800" cy="502920"/>
-          </a:xfrm>
-          <a:prstGeom prst="rect">
-            <a:avLst/>
-          </a:prstGeom>
-          <a:noFill/>
-        </p:spPr>
-        <p:txBody>
-          <a:bodyPr wrap="square">
-            <a:spAutoFit/>
-          </a:bodyPr>
-          <a:lstStyle/>
-          <a:p>
-            <a:pPr algn="l"/>
-            <a:r>
-              <a:rPr sz="1800" b="1" i="0">
-                <a:solidFill>
-                  <a:srgbClr val="FFFFFF"/>
-                </a:solidFill>
-              </a:rPr>
-              <a:t>Construit pour l'Afrique de l'Ouest.</a:t>
-            </a:r>
-          </a:p>
-        </p:txBody>
-      </p:sp>
-      <p:sp>
-        <p:nvSpPr>
-          <p:cNvPr id="14" name="TextBox 13"/>
-          <p:cNvSpPr txBox="1"/>
-          <p:nvPr/>
-        </p:nvSpPr>
-        <p:spPr>
-          <a:xfrm>
-            <a:off x="713232" y="5349240"/>
-            <a:ext cx="10972800" cy="685800"/>
-          </a:xfrm>
-          <a:prstGeom prst="rect">
-            <a:avLst/>
-          </a:prstGeom>
-          <a:noFill/>
-        </p:spPr>
-        <p:txBody>
-          <a:bodyPr wrap="square">
-            <a:spAutoFit/>
-          </a:bodyPr>
-          <a:lstStyle/>
-          <a:p>
-            <a:pPr algn="l"/>
-            <a:r>
-              <a:rPr sz="1300" b="0" i="0">
-                <a:solidFill>
-                  <a:srgbClr val="64748B"/>
-                </a:solidFill>
-              </a:rPr>
-              <a:t>Open source. Code auditable. Calibré sur les dynamiques médiatiques locales. Accessible pour une ONG à budget limité au Sahel.</a:t>
+              <a:rPr sz="1000" b="0" i="0">
+                <a:solidFill>
+                  <a:srgbClr val="059669"/>
+                </a:solidFill>
+              </a:rPr>
+              <a:t>terroir.up.railway.app/#/live</a:t>
             </a:r>
           </a:p>
         </p:txBody>
@@ -5090,7 +4726,7 @@
 </file>
 
 <file path=ppt/slides/slide5.xml><?xml version="1.0" encoding="utf-8"?>
-<p:sld xmlns:a="http://schemas.openxmlformats.org/drawingml/2006/main" xmlns:r="http://schemas.openxmlformats.org/officeDocument/2006/relationships" xmlns:p="http://schemas.openxmlformats.org/presentationml/2006/main">
+<p:sld xmlns:a="http://schemas.openxmlformats.org/drawingml/2006/main" xmlns:p="http://schemas.openxmlformats.org/presentationml/2006/main" xmlns:r="http://schemas.openxmlformats.org/officeDocument/2006/relationships">
   <p:cSld>
     <p:bg>
       <p:bgPr>
@@ -5106,137 +4742,26 @@
         <p:cNvGrpSpPr/>
         <p:nvPr/>
       </p:nvGrpSpPr>
-      <p:grpSpPr>
-        <a:xfrm>
-          <a:off x="0" y="0"/>
-          <a:ext cx="0" cy="0"/>
-          <a:chOff x="0" y="0"/>
-          <a:chExt cx="0" cy="0"/>
-        </a:xfrm>
-      </p:grpSpPr>
-      <p:sp>
-        <p:nvSpPr>
-          <p:cNvPr id="2" name="TextBox 1"/>
-          <p:cNvSpPr txBox="1"/>
-          <p:nvPr/>
-        </p:nvSpPr>
-        <p:spPr>
-          <a:xfrm>
-            <a:off x="11475720" y="6565392"/>
-            <a:ext cx="594360" cy="201168"/>
-          </a:xfrm>
-          <a:prstGeom prst="rect">
-            <a:avLst/>
-          </a:prstGeom>
-          <a:noFill/>
-        </p:spPr>
-        <p:txBody>
-          <a:bodyPr wrap="square">
-            <a:spAutoFit/>
-          </a:bodyPr>
-          <a:lstStyle/>
-          <a:p>
-            <a:pPr algn="r"/>
-            <a:r>
-              <a:rPr sz="900" b="0" i="0">
-                <a:solidFill>
-                  <a:srgbClr val="64748B"/>
-                </a:solidFill>
-              </a:rPr>
-              <a:t>4 / 8</a:t>
-            </a:r>
-          </a:p>
-        </p:txBody>
-      </p:sp>
-      <p:sp>
-        <p:nvSpPr>
-          <p:cNvPr id="3" name="TextBox 2"/>
-          <p:cNvSpPr txBox="1"/>
-          <p:nvPr/>
-        </p:nvSpPr>
-        <p:spPr>
-          <a:xfrm>
-            <a:off x="457200" y="182880"/>
-            <a:ext cx="8229600" cy="594360"/>
-          </a:xfrm>
-          <a:prstGeom prst="rect">
-            <a:avLst/>
-          </a:prstGeom>
-          <a:noFill/>
-        </p:spPr>
-        <p:txBody>
-          <a:bodyPr wrap="square">
-            <a:spAutoFit/>
-          </a:bodyPr>
-          <a:lstStyle/>
-          <a:p>
-            <a:pPr algn="l"/>
-            <a:r>
-              <a:rPr sz="2400" b="1" i="0">
-                <a:solidFill>
-                  <a:srgbClr val="FFFFFF"/>
-                </a:solidFill>
-              </a:rPr>
-              <a:t>La carte live.</a:t>
-            </a:r>
-          </a:p>
-        </p:txBody>
-      </p:sp>
-      <p:sp>
-        <p:nvSpPr>
-          <p:cNvPr id="4" name="TextBox 3"/>
-          <p:cNvSpPr txBox="1"/>
-          <p:nvPr/>
-        </p:nvSpPr>
-        <p:spPr>
-          <a:xfrm>
-            <a:off x="457200" y="804672"/>
-            <a:ext cx="8229600" cy="365760"/>
-          </a:xfrm>
-          <a:prstGeom prst="rect">
-            <a:avLst/>
-          </a:prstGeom>
-          <a:noFill/>
-        </p:spPr>
-        <p:txBody>
-          <a:bodyPr wrap="square">
-            <a:spAutoFit/>
-          </a:bodyPr>
-          <a:lstStyle/>
-          <a:p>
-            <a:pPr algn="l"/>
-            <a:r>
-              <a:rPr sz="1300" b="0" i="0">
-                <a:solidFill>
-                  <a:srgbClr val="64748B"/>
-                </a:solidFill>
-              </a:rPr>
-              <a:t>GDELT · Signalements terrain · Temps réel</a:t>
-            </a:r>
-          </a:p>
-        </p:txBody>
-      </p:sp>
-      <p:sp>
-        <p:nvSpPr>
-          <p:cNvPr id="5" name="Rectangle 4"/>
+      <p:grpSpPr/>
+      <p:sp>
+        <p:nvSpPr>
+          <p:cNvPr id="2" name="Rectangle 1"/>
           <p:cNvSpPr/>
           <p:nvPr/>
         </p:nvSpPr>
         <p:spPr>
           <a:xfrm>
-            <a:off x="365760" y="1325880"/>
-            <a:ext cx="11430000" cy="5120640"/>
+            <a:off x="0" y="0"/>
+            <a:ext cx="82296" cy="6858000"/>
           </a:xfrm>
           <a:prstGeom prst="rect">
             <a:avLst/>
           </a:prstGeom>
           <a:solidFill>
-            <a:srgbClr val="161E2E"/>
+            <a:srgbClr val="059669"/>
           </a:solidFill>
-          <a:ln w="12700">
-            <a:solidFill>
-              <a:srgbClr val="384A5E"/>
-            </a:solidFill>
+          <a:ln>
+            <a:noFill/>
           </a:ln>
         </p:spPr>
         <p:style>
@@ -5258,20 +4783,19 @@
           <a:lstStyle/>
           <a:p>
             <a:pPr algn="ctr"/>
-            <a:endParaRPr/>
-          </a:p>
-        </p:txBody>
-      </p:sp>
-      <p:sp>
-        <p:nvSpPr>
-          <p:cNvPr id="6" name="TextBox 5"/>
+          </a:p>
+        </p:txBody>
+      </p:sp>
+      <p:sp>
+        <p:nvSpPr>
+          <p:cNvPr id="3" name="TextBox 2"/>
           <p:cNvSpPr txBox="1"/>
           <p:nvPr/>
         </p:nvSpPr>
         <p:spPr>
           <a:xfrm>
-            <a:off x="640080" y="3337560"/>
-            <a:ext cx="10881360" cy="365760"/>
+            <a:off x="11475720" y="6565392"/>
+            <a:ext cx="594360" cy="201168"/>
           </a:xfrm>
           <a:prstGeom prst="rect">
             <a:avLst/>
@@ -5284,28 +4808,28 @@
           </a:bodyPr>
           <a:lstStyle/>
           <a:p>
-            <a:pPr algn="ctr"/>
-            <a:r>
-              <a:rPr sz="1100" b="0" i="0">
-                <a:solidFill>
-                  <a:srgbClr val="384A5E"/>
-                </a:solidFill>
-              </a:rPr>
-              <a:t>[ CAPTURE À INSÉRER ]</a:t>
-            </a:r>
-          </a:p>
-        </p:txBody>
-      </p:sp>
-      <p:sp>
-        <p:nvSpPr>
-          <p:cNvPr id="7" name="TextBox 6"/>
+            <a:pPr algn="r"/>
+            <a:r>
+              <a:rPr sz="900" b="0" i="0">
+                <a:solidFill>
+                  <a:srgbClr val="64748B"/>
+                </a:solidFill>
+              </a:rPr>
+              <a:t>5 / 8</a:t>
+            </a:r>
+          </a:p>
+        </p:txBody>
+      </p:sp>
+      <p:sp>
+        <p:nvSpPr>
+          <p:cNvPr id="4" name="TextBox 3"/>
           <p:cNvSpPr txBox="1"/>
           <p:nvPr/>
         </p:nvSpPr>
         <p:spPr>
           <a:xfrm>
-            <a:off x="640080" y="3749039"/>
-            <a:ext cx="10881360" cy="411480"/>
+            <a:off x="502920" y="274320"/>
+            <a:ext cx="8229600" cy="685800"/>
           </a:xfrm>
           <a:prstGeom prst="rect">
             <a:avLst/>
@@ -5318,28 +4842,114 @@
           </a:bodyPr>
           <a:lstStyle/>
           <a:p>
+            <a:pPr algn="l"/>
+            <a:r>
+              <a:rPr sz="2400" b="1" i="0">
+                <a:solidFill>
+                  <a:srgbClr val="FFFFFF"/>
+                </a:solidFill>
+              </a:rPr>
+              <a:t>Deux sources. Un signal. Une décision.</a:t>
+            </a:r>
+          </a:p>
+        </p:txBody>
+      </p:sp>
+      <p:sp>
+        <p:nvSpPr>
+          <p:cNvPr id="5" name="Rectangle 4"/>
+          <p:cNvSpPr/>
+          <p:nvPr/>
+        </p:nvSpPr>
+        <p:spPr>
+          <a:xfrm>
+            <a:off x="502920" y="1024128"/>
+            <a:ext cx="822960" cy="45720"/>
+          </a:xfrm>
+          <a:prstGeom prst="rect">
+            <a:avLst/>
+          </a:prstGeom>
+          <a:solidFill>
+            <a:srgbClr val="059669"/>
+          </a:solidFill>
+          <a:ln>
+            <a:noFill/>
+          </a:ln>
+        </p:spPr>
+        <p:style>
+          <a:lnRef idx="1">
+            <a:schemeClr val="accent1"/>
+          </a:lnRef>
+          <a:fillRef idx="3">
+            <a:schemeClr val="accent1"/>
+          </a:fillRef>
+          <a:effectRef idx="2">
+            <a:schemeClr val="accent1"/>
+          </a:effectRef>
+          <a:fontRef idx="minor">
+            <a:schemeClr val="lt1"/>
+          </a:fontRef>
+        </p:style>
+        <p:txBody>
+          <a:bodyPr rtlCol="0" anchor="ctr"/>
+          <a:lstStyle/>
+          <a:p>
             <a:pPr algn="ctr"/>
-            <a:r>
-              <a:rPr sz="1300" b="1" i="0">
-                <a:solidFill>
-                  <a:srgbClr val="64748B"/>
-                </a:solidFill>
-              </a:rPr>
-              <a:t>Carte Live — terroir.up.railway.app/#/live</a:t>
-            </a:r>
-          </a:p>
-        </p:txBody>
-      </p:sp>
-      <p:sp>
-        <p:nvSpPr>
-          <p:cNvPr id="8" name="TextBox 7"/>
+          </a:p>
+        </p:txBody>
+      </p:sp>
+      <p:sp>
+        <p:nvSpPr>
+          <p:cNvPr id="6" name="Rectangle 5"/>
+          <p:cNvSpPr/>
+          <p:nvPr/>
+        </p:nvSpPr>
+        <p:spPr>
+          <a:xfrm>
+            <a:off x="502920" y="1234440"/>
+            <a:ext cx="73152" cy="347472"/>
+          </a:xfrm>
+          <a:prstGeom prst="rect">
+            <a:avLst/>
+          </a:prstGeom>
+          <a:solidFill>
+            <a:srgbClr val="059669"/>
+          </a:solidFill>
+          <a:ln>
+            <a:noFill/>
+          </a:ln>
+        </p:spPr>
+        <p:style>
+          <a:lnRef idx="1">
+            <a:schemeClr val="accent1"/>
+          </a:lnRef>
+          <a:fillRef idx="3">
+            <a:schemeClr val="accent1"/>
+          </a:fillRef>
+          <a:effectRef idx="2">
+            <a:schemeClr val="accent1"/>
+          </a:effectRef>
+          <a:fontRef idx="minor">
+            <a:schemeClr val="lt1"/>
+          </a:fontRef>
+        </p:style>
+        <p:txBody>
+          <a:bodyPr rtlCol="0" anchor="ctr"/>
+          <a:lstStyle/>
+          <a:p>
+            <a:pPr algn="ctr"/>
+          </a:p>
+        </p:txBody>
+      </p:sp>
+      <p:sp>
+        <p:nvSpPr>
+          <p:cNvPr id="7" name="TextBox 6"/>
           <p:cNvSpPr txBox="1"/>
           <p:nvPr/>
         </p:nvSpPr>
         <p:spPr>
           <a:xfrm>
-            <a:off x="640080" y="4206240"/>
-            <a:ext cx="10881360" cy="457200"/>
+            <a:off x="685800" y="1234440"/>
+            <a:ext cx="2651760" cy="365760"/>
           </a:xfrm>
           <a:prstGeom prst="rect">
             <a:avLst/>
@@ -5352,28 +4962,28 @@
           </a:bodyPr>
           <a:lstStyle/>
           <a:p>
-            <a:pPr algn="ctr"/>
-            <a:r>
-              <a:rPr sz="1000" b="0" i="1">
-                <a:solidFill>
-                  <a:srgbClr val="64748B"/>
-                </a:solidFill>
-              </a:rPr>
-              <a:t>Montrer : carte Bénin · marqueurs GDELT · signalements citoyens · interface visible</a:t>
-            </a:r>
-          </a:p>
-        </p:txBody>
-      </p:sp>
-      <p:sp>
-        <p:nvSpPr>
-          <p:cNvPr id="9" name="TextBox 8"/>
+            <a:pPr algn="l"/>
+            <a:r>
+              <a:rPr sz="1400" b="1" i="0">
+                <a:solidFill>
+                  <a:srgbClr val="059669"/>
+                </a:solidFill>
+              </a:rPr>
+              <a:t>GDELT</a:t>
+            </a:r>
+          </a:p>
+        </p:txBody>
+      </p:sp>
+      <p:sp>
+        <p:nvSpPr>
+          <p:cNvPr id="8" name="TextBox 7"/>
           <p:cNvSpPr txBox="1"/>
           <p:nvPr/>
         </p:nvSpPr>
         <p:spPr>
           <a:xfrm>
-            <a:off x="457200" y="6510528"/>
-            <a:ext cx="8229600" cy="256032"/>
+            <a:off x="3429000" y="1234440"/>
+            <a:ext cx="2468880" cy="365760"/>
           </a:xfrm>
           <a:prstGeom prst="rect">
             <a:avLst/>
@@ -5388,12 +4998,887 @@
           <a:p>
             <a:pPr algn="l"/>
             <a:r>
-              <a:rPr sz="1000" b="0" i="0">
+              <a:rPr sz="1200" b="0" i="0">
+                <a:solidFill>
+                  <a:srgbClr val="64748B"/>
+                </a:solidFill>
+              </a:rPr>
+              <a:t>Médias internationaux · toutes les 15 min</a:t>
+            </a:r>
+          </a:p>
+        </p:txBody>
+      </p:sp>
+      <p:sp>
+        <p:nvSpPr>
+          <p:cNvPr id="9" name="TextBox 8"/>
+          <p:cNvSpPr txBox="1"/>
+          <p:nvPr/>
+        </p:nvSpPr>
+        <p:spPr>
+          <a:xfrm>
+            <a:off x="822960" y="1600200"/>
+            <a:ext cx="320040" cy="274320"/>
+          </a:xfrm>
+          <a:prstGeom prst="rect">
+            <a:avLst/>
+          </a:prstGeom>
+          <a:noFill/>
+        </p:spPr>
+        <p:txBody>
+          <a:bodyPr wrap="square">
+            <a:spAutoFit/>
+          </a:bodyPr>
+          <a:lstStyle/>
+          <a:p>
+            <a:pPr algn="l"/>
+            <a:r>
+              <a:rPr sz="1300" b="0" i="0">
+                <a:solidFill>
+                  <a:srgbClr val="64748B"/>
+                </a:solidFill>
+              </a:rPr>
+              <a:t>↓</a:t>
+            </a:r>
+          </a:p>
+        </p:txBody>
+      </p:sp>
+      <p:sp>
+        <p:nvSpPr>
+          <p:cNvPr id="10" name="Rectangle 9"/>
+          <p:cNvSpPr/>
+          <p:nvPr/>
+        </p:nvSpPr>
+        <p:spPr>
+          <a:xfrm>
+            <a:off x="502920" y="1856232"/>
+            <a:ext cx="73152" cy="347472"/>
+          </a:xfrm>
+          <a:prstGeom prst="rect">
+            <a:avLst/>
+          </a:prstGeom>
+          <a:solidFill>
+            <a:srgbClr val="059669"/>
+          </a:solidFill>
+          <a:ln>
+            <a:noFill/>
+          </a:ln>
+        </p:spPr>
+        <p:style>
+          <a:lnRef idx="1">
+            <a:schemeClr val="accent1"/>
+          </a:lnRef>
+          <a:fillRef idx="3">
+            <a:schemeClr val="accent1"/>
+          </a:fillRef>
+          <a:effectRef idx="2">
+            <a:schemeClr val="accent1"/>
+          </a:effectRef>
+          <a:fontRef idx="minor">
+            <a:schemeClr val="lt1"/>
+          </a:fontRef>
+        </p:style>
+        <p:txBody>
+          <a:bodyPr rtlCol="0" anchor="ctr"/>
+          <a:lstStyle/>
+          <a:p>
+            <a:pPr algn="ctr"/>
+          </a:p>
+        </p:txBody>
+      </p:sp>
+      <p:sp>
+        <p:nvSpPr>
+          <p:cNvPr id="11" name="TextBox 10"/>
+          <p:cNvSpPr txBox="1"/>
+          <p:nvPr/>
+        </p:nvSpPr>
+        <p:spPr>
+          <a:xfrm>
+            <a:off x="685800" y="1856232"/>
+            <a:ext cx="2651760" cy="365760"/>
+          </a:xfrm>
+          <a:prstGeom prst="rect">
+            <a:avLst/>
+          </a:prstGeom>
+          <a:noFill/>
+        </p:spPr>
+        <p:txBody>
+          <a:bodyPr wrap="square">
+            <a:spAutoFit/>
+          </a:bodyPr>
+          <a:lstStyle/>
+          <a:p>
+            <a:pPr algn="l"/>
+            <a:r>
+              <a:rPr sz="1400" b="1" i="0">
                 <a:solidFill>
                   <a:srgbClr val="059669"/>
                 </a:solidFill>
               </a:rPr>
-              <a:t>terroir.up.railway.app/#/live</a:t>
+              <a:t>Signalements terrain</a:t>
+            </a:r>
+          </a:p>
+        </p:txBody>
+      </p:sp>
+      <p:sp>
+        <p:nvSpPr>
+          <p:cNvPr id="12" name="TextBox 11"/>
+          <p:cNvSpPr txBox="1"/>
+          <p:nvPr/>
+        </p:nvSpPr>
+        <p:spPr>
+          <a:xfrm>
+            <a:off x="3429000" y="1856232"/>
+            <a:ext cx="2468880" cy="365760"/>
+          </a:xfrm>
+          <a:prstGeom prst="rect">
+            <a:avLst/>
+          </a:prstGeom>
+          <a:noFill/>
+        </p:spPr>
+        <p:txBody>
+          <a:bodyPr wrap="square">
+            <a:spAutoFit/>
+          </a:bodyPr>
+          <a:lstStyle/>
+          <a:p>
+            <a:pPr algn="l"/>
+            <a:r>
+              <a:rPr sz="1200" b="0" i="0">
+                <a:solidFill>
+                  <a:srgbClr val="64748B"/>
+                </a:solidFill>
+              </a:rPr>
+              <a:t>Citoyens + ONG · géolocalisés GPS</a:t>
+            </a:r>
+          </a:p>
+        </p:txBody>
+      </p:sp>
+      <p:sp>
+        <p:nvSpPr>
+          <p:cNvPr id="13" name="TextBox 12"/>
+          <p:cNvSpPr txBox="1"/>
+          <p:nvPr/>
+        </p:nvSpPr>
+        <p:spPr>
+          <a:xfrm>
+            <a:off x="822960" y="2221992"/>
+            <a:ext cx="320040" cy="274320"/>
+          </a:xfrm>
+          <a:prstGeom prst="rect">
+            <a:avLst/>
+          </a:prstGeom>
+          <a:noFill/>
+        </p:spPr>
+        <p:txBody>
+          <a:bodyPr wrap="square">
+            <a:spAutoFit/>
+          </a:bodyPr>
+          <a:lstStyle/>
+          <a:p>
+            <a:pPr algn="l"/>
+            <a:r>
+              <a:rPr sz="1300" b="0" i="0">
+                <a:solidFill>
+                  <a:srgbClr val="64748B"/>
+                </a:solidFill>
+              </a:rPr>
+              <a:t>↓</a:t>
+            </a:r>
+          </a:p>
+        </p:txBody>
+      </p:sp>
+      <p:sp>
+        <p:nvSpPr>
+          <p:cNvPr id="14" name="Rectangle 13"/>
+          <p:cNvSpPr/>
+          <p:nvPr/>
+        </p:nvSpPr>
+        <p:spPr>
+          <a:xfrm>
+            <a:off x="502920" y="2478024"/>
+            <a:ext cx="73152" cy="347472"/>
+          </a:xfrm>
+          <a:prstGeom prst="rect">
+            <a:avLst/>
+          </a:prstGeom>
+          <a:solidFill>
+            <a:srgbClr val="F59E0B"/>
+          </a:solidFill>
+          <a:ln>
+            <a:noFill/>
+          </a:ln>
+        </p:spPr>
+        <p:style>
+          <a:lnRef idx="1">
+            <a:schemeClr val="accent1"/>
+          </a:lnRef>
+          <a:fillRef idx="3">
+            <a:schemeClr val="accent1"/>
+          </a:fillRef>
+          <a:effectRef idx="2">
+            <a:schemeClr val="accent1"/>
+          </a:effectRef>
+          <a:fontRef idx="minor">
+            <a:schemeClr val="lt1"/>
+          </a:fontRef>
+        </p:style>
+        <p:txBody>
+          <a:bodyPr rtlCol="0" anchor="ctr"/>
+          <a:lstStyle/>
+          <a:p>
+            <a:pPr algn="ctr"/>
+          </a:p>
+        </p:txBody>
+      </p:sp>
+      <p:sp>
+        <p:nvSpPr>
+          <p:cNvPr id="15" name="TextBox 14"/>
+          <p:cNvSpPr txBox="1"/>
+          <p:nvPr/>
+        </p:nvSpPr>
+        <p:spPr>
+          <a:xfrm>
+            <a:off x="685800" y="2478024"/>
+            <a:ext cx="2651760" cy="365760"/>
+          </a:xfrm>
+          <a:prstGeom prst="rect">
+            <a:avLst/>
+          </a:prstGeom>
+          <a:noFill/>
+        </p:spPr>
+        <p:txBody>
+          <a:bodyPr wrap="square">
+            <a:spAutoFit/>
+          </a:bodyPr>
+          <a:lstStyle/>
+          <a:p>
+            <a:pPr algn="l"/>
+            <a:r>
+              <a:rPr sz="1400" b="1" i="0">
+                <a:solidFill>
+                  <a:srgbClr val="F59E0B"/>
+                </a:solidFill>
+              </a:rPr>
+              <a:t>Carte live</a:t>
+            </a:r>
+          </a:p>
+        </p:txBody>
+      </p:sp>
+      <p:sp>
+        <p:nvSpPr>
+          <p:cNvPr id="16" name="TextBox 15"/>
+          <p:cNvSpPr txBox="1"/>
+          <p:nvPr/>
+        </p:nvSpPr>
+        <p:spPr>
+          <a:xfrm>
+            <a:off x="3429000" y="2478024"/>
+            <a:ext cx="2468880" cy="365760"/>
+          </a:xfrm>
+          <a:prstGeom prst="rect">
+            <a:avLst/>
+          </a:prstGeom>
+          <a:noFill/>
+        </p:spPr>
+        <p:txBody>
+          <a:bodyPr wrap="square">
+            <a:spAutoFit/>
+          </a:bodyPr>
+          <a:lstStyle/>
+          <a:p>
+            <a:pPr algn="l"/>
+            <a:r>
+              <a:rPr sz="1200" b="0" i="0">
+                <a:solidFill>
+                  <a:srgbClr val="64748B"/>
+                </a:solidFill>
+              </a:rPr>
+              <a:t>Un seul tableau de bord, pour tous</a:t>
+            </a:r>
+          </a:p>
+        </p:txBody>
+      </p:sp>
+      <p:sp>
+        <p:nvSpPr>
+          <p:cNvPr id="17" name="TextBox 16"/>
+          <p:cNvSpPr txBox="1"/>
+          <p:nvPr/>
+        </p:nvSpPr>
+        <p:spPr>
+          <a:xfrm>
+            <a:off x="822960" y="2843784"/>
+            <a:ext cx="320040" cy="274320"/>
+          </a:xfrm>
+          <a:prstGeom prst="rect">
+            <a:avLst/>
+          </a:prstGeom>
+          <a:noFill/>
+        </p:spPr>
+        <p:txBody>
+          <a:bodyPr wrap="square">
+            <a:spAutoFit/>
+          </a:bodyPr>
+          <a:lstStyle/>
+          <a:p>
+            <a:pPr algn="l"/>
+            <a:r>
+              <a:rPr sz="1300" b="0" i="0">
+                <a:solidFill>
+                  <a:srgbClr val="64748B"/>
+                </a:solidFill>
+              </a:rPr>
+              <a:t>↓</a:t>
+            </a:r>
+          </a:p>
+        </p:txBody>
+      </p:sp>
+      <p:sp>
+        <p:nvSpPr>
+          <p:cNvPr id="18" name="Rectangle 17"/>
+          <p:cNvSpPr/>
+          <p:nvPr/>
+        </p:nvSpPr>
+        <p:spPr>
+          <a:xfrm>
+            <a:off x="502920" y="3099816"/>
+            <a:ext cx="73152" cy="347472"/>
+          </a:xfrm>
+          <a:prstGeom prst="rect">
+            <a:avLst/>
+          </a:prstGeom>
+          <a:solidFill>
+            <a:srgbClr val="F59E0B"/>
+          </a:solidFill>
+          <a:ln>
+            <a:noFill/>
+          </a:ln>
+        </p:spPr>
+        <p:style>
+          <a:lnRef idx="1">
+            <a:schemeClr val="accent1"/>
+          </a:lnRef>
+          <a:fillRef idx="3">
+            <a:schemeClr val="accent1"/>
+          </a:fillRef>
+          <a:effectRef idx="2">
+            <a:schemeClr val="accent1"/>
+          </a:effectRef>
+          <a:fontRef idx="minor">
+            <a:schemeClr val="lt1"/>
+          </a:fontRef>
+        </p:style>
+        <p:txBody>
+          <a:bodyPr rtlCol="0" anchor="ctr"/>
+          <a:lstStyle/>
+          <a:p>
+            <a:pPr algn="ctr"/>
+          </a:p>
+        </p:txBody>
+      </p:sp>
+      <p:sp>
+        <p:nvSpPr>
+          <p:cNvPr id="19" name="TextBox 18"/>
+          <p:cNvSpPr txBox="1"/>
+          <p:nvPr/>
+        </p:nvSpPr>
+        <p:spPr>
+          <a:xfrm>
+            <a:off x="685800" y="3099816"/>
+            <a:ext cx="2651760" cy="365760"/>
+          </a:xfrm>
+          <a:prstGeom prst="rect">
+            <a:avLst/>
+          </a:prstGeom>
+          <a:noFill/>
+        </p:spPr>
+        <p:txBody>
+          <a:bodyPr wrap="square">
+            <a:spAutoFit/>
+          </a:bodyPr>
+          <a:lstStyle/>
+          <a:p>
+            <a:pPr algn="l"/>
+            <a:r>
+              <a:rPr sz="1400" b="1" i="0">
+                <a:solidFill>
+                  <a:srgbClr val="F59E0B"/>
+                </a:solidFill>
+              </a:rPr>
+              <a:t>Score de tension</a:t>
+            </a:r>
+          </a:p>
+        </p:txBody>
+      </p:sp>
+      <p:sp>
+        <p:nvSpPr>
+          <p:cNvPr id="20" name="TextBox 19"/>
+          <p:cNvSpPr txBox="1"/>
+          <p:nvPr/>
+        </p:nvSpPr>
+        <p:spPr>
+          <a:xfrm>
+            <a:off x="3429000" y="3099816"/>
+            <a:ext cx="2468880" cy="365760"/>
+          </a:xfrm>
+          <a:prstGeom prst="rect">
+            <a:avLst/>
+          </a:prstGeom>
+          <a:noFill/>
+        </p:spPr>
+        <p:txBody>
+          <a:bodyPr wrap="square">
+            <a:spAutoFit/>
+          </a:bodyPr>
+          <a:lstStyle/>
+          <a:p>
+            <a:pPr algn="l"/>
+            <a:r>
+              <a:rPr sz="1200" b="0" i="0">
+                <a:solidFill>
+                  <a:srgbClr val="64748B"/>
+                </a:solidFill>
+              </a:rPr>
+              <a:t>Par département · calculé quotidiennement</a:t>
+            </a:r>
+          </a:p>
+        </p:txBody>
+      </p:sp>
+      <p:sp>
+        <p:nvSpPr>
+          <p:cNvPr id="21" name="TextBox 20"/>
+          <p:cNvSpPr txBox="1"/>
+          <p:nvPr/>
+        </p:nvSpPr>
+        <p:spPr>
+          <a:xfrm>
+            <a:off x="822960" y="3465576"/>
+            <a:ext cx="320040" cy="274320"/>
+          </a:xfrm>
+          <a:prstGeom prst="rect">
+            <a:avLst/>
+          </a:prstGeom>
+          <a:noFill/>
+        </p:spPr>
+        <p:txBody>
+          <a:bodyPr wrap="square">
+            <a:spAutoFit/>
+          </a:bodyPr>
+          <a:lstStyle/>
+          <a:p>
+            <a:pPr algn="l"/>
+            <a:r>
+              <a:rPr sz="1300" b="0" i="0">
+                <a:solidFill>
+                  <a:srgbClr val="64748B"/>
+                </a:solidFill>
+              </a:rPr>
+              <a:t>↓</a:t>
+            </a:r>
+          </a:p>
+        </p:txBody>
+      </p:sp>
+      <p:sp>
+        <p:nvSpPr>
+          <p:cNvPr id="22" name="Rectangle 21"/>
+          <p:cNvSpPr/>
+          <p:nvPr/>
+        </p:nvSpPr>
+        <p:spPr>
+          <a:xfrm>
+            <a:off x="502920" y="3721608"/>
+            <a:ext cx="73152" cy="347472"/>
+          </a:xfrm>
+          <a:prstGeom prst="rect">
+            <a:avLst/>
+          </a:prstGeom>
+          <a:solidFill>
+            <a:srgbClr val="FFFFFF"/>
+          </a:solidFill>
+          <a:ln>
+            <a:noFill/>
+          </a:ln>
+        </p:spPr>
+        <p:style>
+          <a:lnRef idx="1">
+            <a:schemeClr val="accent1"/>
+          </a:lnRef>
+          <a:fillRef idx="3">
+            <a:schemeClr val="accent1"/>
+          </a:fillRef>
+          <a:effectRef idx="2">
+            <a:schemeClr val="accent1"/>
+          </a:effectRef>
+          <a:fontRef idx="minor">
+            <a:schemeClr val="lt1"/>
+          </a:fontRef>
+        </p:style>
+        <p:txBody>
+          <a:bodyPr rtlCol="0" anchor="ctr"/>
+          <a:lstStyle/>
+          <a:p>
+            <a:pPr algn="ctr"/>
+          </a:p>
+        </p:txBody>
+      </p:sp>
+      <p:sp>
+        <p:nvSpPr>
+          <p:cNvPr id="23" name="TextBox 22"/>
+          <p:cNvSpPr txBox="1"/>
+          <p:nvPr/>
+        </p:nvSpPr>
+        <p:spPr>
+          <a:xfrm>
+            <a:off x="685800" y="3721608"/>
+            <a:ext cx="2651760" cy="365760"/>
+          </a:xfrm>
+          <a:prstGeom prst="rect">
+            <a:avLst/>
+          </a:prstGeom>
+          <a:noFill/>
+        </p:spPr>
+        <p:txBody>
+          <a:bodyPr wrap="square">
+            <a:spAutoFit/>
+          </a:bodyPr>
+          <a:lstStyle/>
+          <a:p>
+            <a:pPr algn="l"/>
+            <a:r>
+              <a:rPr sz="1400" b="1" i="0">
+                <a:solidFill>
+                  <a:srgbClr val="FFFFFF"/>
+                </a:solidFill>
+              </a:rPr>
+              <a:t>Alerte</a:t>
+            </a:r>
+          </a:p>
+        </p:txBody>
+      </p:sp>
+      <p:sp>
+        <p:nvSpPr>
+          <p:cNvPr id="24" name="TextBox 23"/>
+          <p:cNvSpPr txBox="1"/>
+          <p:nvPr/>
+        </p:nvSpPr>
+        <p:spPr>
+          <a:xfrm>
+            <a:off x="3429000" y="3721608"/>
+            <a:ext cx="2468880" cy="365760"/>
+          </a:xfrm>
+          <a:prstGeom prst="rect">
+            <a:avLst/>
+          </a:prstGeom>
+          <a:noFill/>
+        </p:spPr>
+        <p:txBody>
+          <a:bodyPr wrap="square">
+            <a:spAutoFit/>
+          </a:bodyPr>
+          <a:lstStyle/>
+          <a:p>
+            <a:pPr algn="l"/>
+            <a:r>
+              <a:rPr sz="1200" b="0" i="0">
+                <a:solidFill>
+                  <a:srgbClr val="64748B"/>
+                </a:solidFill>
+              </a:rPr>
+              <a:t>Zone · score · précédent · recommandation</a:t>
+            </a:r>
+          </a:p>
+        </p:txBody>
+      </p:sp>
+      <p:sp>
+        <p:nvSpPr>
+          <p:cNvPr id="25" name="Rectangle 24"/>
+          <p:cNvSpPr/>
+          <p:nvPr/>
+        </p:nvSpPr>
+        <p:spPr>
+          <a:xfrm>
+            <a:off x="6172200" y="1234440"/>
+            <a:ext cx="36576" cy="5029200"/>
+          </a:xfrm>
+          <a:prstGeom prst="rect">
+            <a:avLst/>
+          </a:prstGeom>
+          <a:solidFill>
+            <a:srgbClr val="64748B"/>
+          </a:solidFill>
+          <a:ln>
+            <a:noFill/>
+          </a:ln>
+        </p:spPr>
+        <p:style>
+          <a:lnRef idx="1">
+            <a:schemeClr val="accent1"/>
+          </a:lnRef>
+          <a:fillRef idx="3">
+            <a:schemeClr val="accent1"/>
+          </a:fillRef>
+          <a:effectRef idx="2">
+            <a:schemeClr val="accent1"/>
+          </a:effectRef>
+          <a:fontRef idx="minor">
+            <a:schemeClr val="lt1"/>
+          </a:fontRef>
+        </p:style>
+        <p:txBody>
+          <a:bodyPr rtlCol="0" anchor="ctr"/>
+          <a:lstStyle/>
+          <a:p>
+            <a:pPr algn="ctr"/>
+          </a:p>
+        </p:txBody>
+      </p:sp>
+      <p:sp>
+        <p:nvSpPr>
+          <p:cNvPr id="26" name="Rectangle 25"/>
+          <p:cNvSpPr/>
+          <p:nvPr/>
+        </p:nvSpPr>
+        <p:spPr>
+          <a:xfrm>
+            <a:off x="6355080" y="1234440"/>
+            <a:ext cx="5486400" cy="5029200"/>
+          </a:xfrm>
+          <a:prstGeom prst="rect">
+            <a:avLst/>
+          </a:prstGeom>
+          <a:solidFill>
+            <a:srgbClr val="0A0F1A"/>
+          </a:solidFill>
+          <a:ln>
+            <a:noFill/>
+          </a:ln>
+        </p:spPr>
+        <p:style>
+          <a:lnRef idx="1">
+            <a:schemeClr val="accent1"/>
+          </a:lnRef>
+          <a:fillRef idx="3">
+            <a:schemeClr val="accent1"/>
+          </a:fillRef>
+          <a:effectRef idx="2">
+            <a:schemeClr val="accent1"/>
+          </a:effectRef>
+          <a:fontRef idx="minor">
+            <a:schemeClr val="lt1"/>
+          </a:fontRef>
+        </p:style>
+        <p:txBody>
+          <a:bodyPr rtlCol="0" anchor="ctr"/>
+          <a:lstStyle/>
+          <a:p>
+            <a:pPr algn="ctr"/>
+          </a:p>
+        </p:txBody>
+      </p:sp>
+      <p:sp>
+        <p:nvSpPr>
+          <p:cNvPr id="27" name="Rectangle 26"/>
+          <p:cNvSpPr/>
+          <p:nvPr/>
+        </p:nvSpPr>
+        <p:spPr>
+          <a:xfrm>
+            <a:off x="6355080" y="1234440"/>
+            <a:ext cx="73152" cy="5029200"/>
+          </a:xfrm>
+          <a:prstGeom prst="rect">
+            <a:avLst/>
+          </a:prstGeom>
+          <a:solidFill>
+            <a:srgbClr val="DC2626"/>
+          </a:solidFill>
+          <a:ln>
+            <a:noFill/>
+          </a:ln>
+        </p:spPr>
+        <p:style>
+          <a:lnRef idx="1">
+            <a:schemeClr val="accent1"/>
+          </a:lnRef>
+          <a:fillRef idx="3">
+            <a:schemeClr val="accent1"/>
+          </a:fillRef>
+          <a:effectRef idx="2">
+            <a:schemeClr val="accent1"/>
+          </a:effectRef>
+          <a:fontRef idx="minor">
+            <a:schemeClr val="lt1"/>
+          </a:fontRef>
+        </p:style>
+        <p:txBody>
+          <a:bodyPr rtlCol="0" anchor="ctr"/>
+          <a:lstStyle/>
+          <a:p>
+            <a:pPr algn="ctr"/>
+          </a:p>
+        </p:txBody>
+      </p:sp>
+      <p:sp>
+        <p:nvSpPr>
+          <p:cNvPr id="28" name="TextBox 27"/>
+          <p:cNvSpPr txBox="1"/>
+          <p:nvPr/>
+        </p:nvSpPr>
+        <p:spPr>
+          <a:xfrm>
+            <a:off x="6556248" y="1389888"/>
+            <a:ext cx="5120640" cy="4663440"/>
+          </a:xfrm>
+          <a:prstGeom prst="rect">
+            <a:avLst/>
+          </a:prstGeom>
+          <a:noFill/>
+        </p:spPr>
+        <p:txBody>
+          <a:bodyPr wrap="square">
+            <a:spAutoFit/>
+          </a:bodyPr>
+          <a:lstStyle/>
+          <a:p>
+            <a:pPr algn="l"/>
+            <a:r>
+              <a:rPr sz="1100" b="1" i="0">
+                <a:solidFill>
+                  <a:srgbClr val="DC2626"/>
+                </a:solidFill>
+              </a:rPr>
+              <a:t>EXEMPLE D'ALERTE</a:t>
+            </a:r>
+          </a:p>
+          <a:p>
+            <a:pPr algn="l"/>
+            <a:r>
+              <a:rPr sz="1500" b="1" i="0">
+                <a:solidFill>
+                  <a:srgbClr val="F59E0B"/>
+                </a:solidFill>
+              </a:rPr>
+              <a:t>Alibori — Score 7,2 / 10</a:t>
+            </a:r>
+          </a:p>
+          <a:p>
+            <a:pPr algn="l"/>
+            <a:r>
+              <a:rPr sz="1200" b="0" i="0">
+                <a:solidFill>
+                  <a:srgbClr val="F59E0B"/>
+                </a:solidFill>
+              </a:rPr>
+              <a:t>[Niveau Précaution — seuil 6,0]</a:t>
+            </a:r>
+          </a:p>
+          <a:p>
+            <a:pPr algn="l"/>
+            <a:r>
+              <a:rPr sz="700" b="0" i="0">
+                <a:solidFill>
+                  <a:srgbClr val="CBD5E1"/>
+                </a:solidFill>
+              </a:rPr>
+              <a:t> </a:t>
+            </a:r>
+          </a:p>
+          <a:p>
+            <a:pPr algn="l"/>
+            <a:r>
+              <a:rPr sz="1200" b="1" i="0">
+                <a:solidFill>
+                  <a:srgbClr val="CBD5E1"/>
+                </a:solidFill>
+              </a:rPr>
+              <a:t>Signaux détectés :</a:t>
+            </a:r>
+          </a:p>
+          <a:p>
+            <a:pPr algn="l"/>
+            <a:r>
+              <a:rPr sz="1200" b="0" i="0">
+                <a:solidFill>
+                  <a:srgbClr val="CBD5E1"/>
+                </a:solidFill>
+              </a:rPr>
+              <a:t>— Incidents CAMEO sécuritaires : +78 % sur 14 jours</a:t>
+            </a:r>
+          </a:p>
+          <a:p>
+            <a:pPr algn="l"/>
+            <a:r>
+              <a:rPr sz="1200" b="0" i="0">
+                <a:solidFill>
+                  <a:srgbClr val="CBD5E1"/>
+                </a:solidFill>
+              </a:rPr>
+              <a:t>— Ton moyen : −4,1  (vs −1,8 médiane nationale)</a:t>
+            </a:r>
+          </a:p>
+          <a:p>
+            <a:pPr algn="l"/>
+            <a:r>
+              <a:rPr sz="1200" b="0" i="0">
+                <a:solidFill>
+                  <a:srgbClr val="CBD5E1"/>
+                </a:solidFill>
+              </a:rPr>
+              <a:t>— 5 médias convergent sur la zone</a:t>
+            </a:r>
+          </a:p>
+          <a:p>
+            <a:pPr algn="l"/>
+            <a:r>
+              <a:rPr sz="700" b="0" i="0">
+                <a:solidFill>
+                  <a:srgbClr val="CBD5E1"/>
+                </a:solidFill>
+              </a:rPr>
+              <a:t> </a:t>
+            </a:r>
+          </a:p>
+          <a:p>
+            <a:pPr algn="l"/>
+            <a:r>
+              <a:rPr sz="1100" b="0" i="1">
+                <a:solidFill>
+                  <a:srgbClr val="64748B"/>
+                </a:solidFill>
+              </a:rPr>
+              <a:t>Précédent : mars 2024  (score 6,8 → restriction d'accès 7j)</a:t>
+            </a:r>
+          </a:p>
+          <a:p>
+            <a:pPr algn="l"/>
+            <a:r>
+              <a:rPr sz="700" b="0" i="0">
+                <a:solidFill>
+                  <a:srgbClr val="CBD5E1"/>
+                </a:solidFill>
+              </a:rPr>
+              <a:t> </a:t>
+            </a:r>
+          </a:p>
+          <a:p>
+            <a:pPr algn="l"/>
+            <a:r>
+              <a:rPr sz="1200" b="1" i="0">
+                <a:solidFill>
+                  <a:srgbClr val="059669"/>
+                </a:solidFill>
+              </a:rPr>
+              <a:t>Action : vérification terrain dans les 48h</a:t>
+            </a:r>
+          </a:p>
+          <a:p>
+            <a:pPr algn="l"/>
+            <a:r>
+              <a:rPr sz="1200" b="0" i="0">
+                <a:solidFill>
+                  <a:srgbClr val="059669"/>
+                </a:solidFill>
+              </a:rPr>
+              <a:t>Si confirmé → notifier OCHA</a:t>
             </a:r>
           </a:p>
         </p:txBody>
@@ -5407,7 +5892,7 @@
 </file>
 
 <file path=ppt/slides/slide6.xml><?xml version="1.0" encoding="utf-8"?>
-<p:sld xmlns:a="http://schemas.openxmlformats.org/drawingml/2006/main" xmlns:r="http://schemas.openxmlformats.org/officeDocument/2006/relationships" xmlns:p="http://schemas.openxmlformats.org/presentationml/2006/main">
+<p:sld xmlns:a="http://schemas.openxmlformats.org/drawingml/2006/main" xmlns:p="http://schemas.openxmlformats.org/presentationml/2006/main" xmlns:r="http://schemas.openxmlformats.org/officeDocument/2006/relationships">
   <p:cSld>
     <p:bg>
       <p:bgPr>
@@ -5423,14 +5908,7 @@
         <p:cNvGrpSpPr/>
         <p:nvPr/>
       </p:nvGrpSpPr>
-      <p:grpSpPr>
-        <a:xfrm>
-          <a:off x="0" y="0"/>
-          <a:ext cx="0" cy="0"/>
-          <a:chOff x="0" y="0"/>
-          <a:chExt cx="0" cy="0"/>
-        </a:xfrm>
-      </p:grpSpPr>
+      <p:grpSpPr/>
       <p:sp>
         <p:nvSpPr>
           <p:cNvPr id="2" name="Rectangle 1"/>
@@ -5441,6 +5919,314 @@
           <a:xfrm>
             <a:off x="0" y="0"/>
             <a:ext cx="82296" cy="6858000"/>
+          </a:xfrm>
+          <a:prstGeom prst="rect">
+            <a:avLst/>
+          </a:prstGeom>
+          <a:solidFill>
+            <a:srgbClr val="F59E0B"/>
+          </a:solidFill>
+          <a:ln>
+            <a:noFill/>
+          </a:ln>
+        </p:spPr>
+        <p:style>
+          <a:lnRef idx="1">
+            <a:schemeClr val="accent1"/>
+          </a:lnRef>
+          <a:fillRef idx="3">
+            <a:schemeClr val="accent1"/>
+          </a:fillRef>
+          <a:effectRef idx="2">
+            <a:schemeClr val="accent1"/>
+          </a:effectRef>
+          <a:fontRef idx="minor">
+            <a:schemeClr val="lt1"/>
+          </a:fontRef>
+        </p:style>
+        <p:txBody>
+          <a:bodyPr rtlCol="0" anchor="ctr"/>
+          <a:lstStyle/>
+          <a:p>
+            <a:pPr algn="ctr"/>
+          </a:p>
+        </p:txBody>
+      </p:sp>
+      <p:sp>
+        <p:nvSpPr>
+          <p:cNvPr id="3" name="TextBox 2"/>
+          <p:cNvSpPr txBox="1"/>
+          <p:nvPr/>
+        </p:nvSpPr>
+        <p:spPr>
+          <a:xfrm>
+            <a:off x="11475720" y="6565392"/>
+            <a:ext cx="594360" cy="201168"/>
+          </a:xfrm>
+          <a:prstGeom prst="rect">
+            <a:avLst/>
+          </a:prstGeom>
+          <a:noFill/>
+        </p:spPr>
+        <p:txBody>
+          <a:bodyPr wrap="square">
+            <a:spAutoFit/>
+          </a:bodyPr>
+          <a:lstStyle/>
+          <a:p>
+            <a:pPr algn="r"/>
+            <a:r>
+              <a:rPr sz="900" b="0" i="0">
+                <a:solidFill>
+                  <a:srgbClr val="64748B"/>
+                </a:solidFill>
+              </a:rPr>
+              <a:t>6 / 8</a:t>
+            </a:r>
+          </a:p>
+        </p:txBody>
+      </p:sp>
+      <p:sp>
+        <p:nvSpPr>
+          <p:cNvPr id="4" name="TextBox 3"/>
+          <p:cNvSpPr txBox="1"/>
+          <p:nvPr/>
+        </p:nvSpPr>
+        <p:spPr>
+          <a:xfrm>
+            <a:off x="502920" y="365760"/>
+            <a:ext cx="9144000" cy="731520"/>
+          </a:xfrm>
+          <a:prstGeom prst="rect">
+            <a:avLst/>
+          </a:prstGeom>
+          <a:noFill/>
+        </p:spPr>
+        <p:txBody>
+          <a:bodyPr wrap="square">
+            <a:spAutoFit/>
+          </a:bodyPr>
+          <a:lstStyle/>
+          <a:p>
+            <a:pPr algn="l"/>
+            <a:r>
+              <a:rPr sz="3000" b="1" i="0">
+                <a:solidFill>
+                  <a:srgbClr val="FFFFFF"/>
+                </a:solidFill>
+              </a:rPr>
+              <a:t>Le calcul est simple.</a:t>
+            </a:r>
+          </a:p>
+        </p:txBody>
+      </p:sp>
+      <p:sp>
+        <p:nvSpPr>
+          <p:cNvPr id="5" name="Rectangle 4"/>
+          <p:cNvSpPr/>
+          <p:nvPr/>
+        </p:nvSpPr>
+        <p:spPr>
+          <a:xfrm>
+            <a:off x="502920" y="1170432"/>
+            <a:ext cx="1005840" cy="45720"/>
+          </a:xfrm>
+          <a:prstGeom prst="rect">
+            <a:avLst/>
+          </a:prstGeom>
+          <a:solidFill>
+            <a:srgbClr val="F59E0B"/>
+          </a:solidFill>
+          <a:ln>
+            <a:noFill/>
+          </a:ln>
+        </p:spPr>
+        <p:style>
+          <a:lnRef idx="1">
+            <a:schemeClr val="accent1"/>
+          </a:lnRef>
+          <a:fillRef idx="3">
+            <a:schemeClr val="accent1"/>
+          </a:fillRef>
+          <a:effectRef idx="2">
+            <a:schemeClr val="accent1"/>
+          </a:effectRef>
+          <a:fontRef idx="minor">
+            <a:schemeClr val="lt1"/>
+          </a:fontRef>
+        </p:style>
+        <p:txBody>
+          <a:bodyPr rtlCol="0" anchor="ctr"/>
+          <a:lstStyle/>
+          <a:p>
+            <a:pPr algn="ctr"/>
+          </a:p>
+        </p:txBody>
+      </p:sp>
+      <p:sp>
+        <p:nvSpPr>
+          <p:cNvPr id="6" name="Rectangle 5"/>
+          <p:cNvSpPr/>
+          <p:nvPr/>
+        </p:nvSpPr>
+        <p:spPr>
+          <a:xfrm>
+            <a:off x="502920" y="1417320"/>
+            <a:ext cx="91440" cy="1280160"/>
+          </a:xfrm>
+          <a:prstGeom prst="rect">
+            <a:avLst/>
+          </a:prstGeom>
+          <a:solidFill>
+            <a:srgbClr val="DC2626"/>
+          </a:solidFill>
+          <a:ln>
+            <a:noFill/>
+          </a:ln>
+        </p:spPr>
+        <p:style>
+          <a:lnRef idx="1">
+            <a:schemeClr val="accent1"/>
+          </a:lnRef>
+          <a:fillRef idx="3">
+            <a:schemeClr val="accent1"/>
+          </a:fillRef>
+          <a:effectRef idx="2">
+            <a:schemeClr val="accent1"/>
+          </a:effectRef>
+          <a:fontRef idx="minor">
+            <a:schemeClr val="lt1"/>
+          </a:fontRef>
+        </p:style>
+        <p:txBody>
+          <a:bodyPr rtlCol="0" anchor="ctr"/>
+          <a:lstStyle/>
+          <a:p>
+            <a:pPr algn="ctr"/>
+          </a:p>
+        </p:txBody>
+      </p:sp>
+      <p:sp>
+        <p:nvSpPr>
+          <p:cNvPr id="7" name="Rectangle 6"/>
+          <p:cNvSpPr/>
+          <p:nvPr/>
+        </p:nvSpPr>
+        <p:spPr>
+          <a:xfrm>
+            <a:off x="685800" y="1417320"/>
+            <a:ext cx="10972800" cy="1280160"/>
+          </a:xfrm>
+          <a:prstGeom prst="rect">
+            <a:avLst/>
+          </a:prstGeom>
+          <a:solidFill>
+            <a:srgbClr val="1E293B"/>
+          </a:solidFill>
+          <a:ln>
+            <a:noFill/>
+          </a:ln>
+        </p:spPr>
+        <p:style>
+          <a:lnRef idx="1">
+            <a:schemeClr val="accent1"/>
+          </a:lnRef>
+          <a:fillRef idx="3">
+            <a:schemeClr val="accent1"/>
+          </a:fillRef>
+          <a:effectRef idx="2">
+            <a:schemeClr val="accent1"/>
+          </a:effectRef>
+          <a:fontRef idx="minor">
+            <a:schemeClr val="lt1"/>
+          </a:fontRef>
+        </p:style>
+        <p:txBody>
+          <a:bodyPr rtlCol="0" anchor="ctr"/>
+          <a:lstStyle/>
+          <a:p>
+            <a:pPr algn="ctr"/>
+          </a:p>
+        </p:txBody>
+      </p:sp>
+      <p:sp>
+        <p:nvSpPr>
+          <p:cNvPr id="8" name="TextBox 7"/>
+          <p:cNvSpPr txBox="1"/>
+          <p:nvPr/>
+        </p:nvSpPr>
+        <p:spPr>
+          <a:xfrm>
+            <a:off x="868680" y="1490472"/>
+            <a:ext cx="7772400" cy="685800"/>
+          </a:xfrm>
+          <a:prstGeom prst="rect">
+            <a:avLst/>
+          </a:prstGeom>
+          <a:noFill/>
+        </p:spPr>
+        <p:txBody>
+          <a:bodyPr wrap="square">
+            <a:spAutoFit/>
+          </a:bodyPr>
+          <a:lstStyle/>
+          <a:p>
+            <a:pPr algn="l"/>
+            <a:r>
+              <a:rPr sz="3800" b="1" i="0">
+                <a:solidFill>
+                  <a:srgbClr val="DC2626"/>
+                </a:solidFill>
+              </a:rPr>
+              <a:t>50 000 – 200 000 €</a:t>
+            </a:r>
+          </a:p>
+        </p:txBody>
+      </p:sp>
+      <p:sp>
+        <p:nvSpPr>
+          <p:cNvPr id="9" name="TextBox 8"/>
+          <p:cNvSpPr txBox="1"/>
+          <p:nvPr/>
+        </p:nvSpPr>
+        <p:spPr>
+          <a:xfrm>
+            <a:off x="868680" y="2194560"/>
+            <a:ext cx="9601200" cy="411480"/>
+          </a:xfrm>
+          <a:prstGeom prst="rect">
+            <a:avLst/>
+          </a:prstGeom>
+          <a:noFill/>
+        </p:spPr>
+        <p:txBody>
+          <a:bodyPr wrap="square">
+            <a:spAutoFit/>
+          </a:bodyPr>
+          <a:lstStyle/>
+          <a:p>
+            <a:pPr algn="l"/>
+            <a:r>
+              <a:rPr sz="1400" b="0" i="0">
+                <a:solidFill>
+                  <a:srgbClr val="CBD5E1"/>
+                </a:solidFill>
+              </a:rPr>
+              <a:t>coût d'une évacuation précipitée d'équipes terrain</a:t>
+            </a:r>
+          </a:p>
+        </p:txBody>
+      </p:sp>
+      <p:sp>
+        <p:nvSpPr>
+          <p:cNvPr id="10" name="Rectangle 9"/>
+          <p:cNvSpPr/>
+          <p:nvPr/>
+        </p:nvSpPr>
+        <p:spPr>
+          <a:xfrm>
+            <a:off x="502920" y="2926080"/>
+            <a:ext cx="91440" cy="1280160"/>
           </a:xfrm>
           <a:prstGeom prst="rect">
             <a:avLst/>
@@ -5471,94 +6257,25 @@
           <a:lstStyle/>
           <a:p>
             <a:pPr algn="ctr"/>
-            <a:endParaRPr/>
-          </a:p>
-        </p:txBody>
-      </p:sp>
-      <p:sp>
-        <p:nvSpPr>
-          <p:cNvPr id="3" name="TextBox 2"/>
-          <p:cNvSpPr txBox="1"/>
-          <p:nvPr/>
-        </p:nvSpPr>
-        <p:spPr>
-          <a:xfrm>
-            <a:off x="11475720" y="6565392"/>
-            <a:ext cx="594360" cy="201168"/>
-          </a:xfrm>
-          <a:prstGeom prst="rect">
-            <a:avLst/>
-          </a:prstGeom>
-          <a:noFill/>
-        </p:spPr>
-        <p:txBody>
-          <a:bodyPr wrap="square">
-            <a:spAutoFit/>
-          </a:bodyPr>
-          <a:lstStyle/>
-          <a:p>
-            <a:pPr algn="r"/>
-            <a:r>
-              <a:rPr sz="900" b="0" i="0">
-                <a:solidFill>
-                  <a:srgbClr val="64748B"/>
-                </a:solidFill>
-              </a:rPr>
-              <a:t>5 / 8</a:t>
-            </a:r>
-          </a:p>
-        </p:txBody>
-      </p:sp>
-      <p:sp>
-        <p:nvSpPr>
-          <p:cNvPr id="4" name="TextBox 3"/>
-          <p:cNvSpPr txBox="1"/>
-          <p:nvPr/>
-        </p:nvSpPr>
-        <p:spPr>
-          <a:xfrm>
-            <a:off x="502920" y="274320"/>
-            <a:ext cx="8229600" cy="685800"/>
-          </a:xfrm>
-          <a:prstGeom prst="rect">
-            <a:avLst/>
-          </a:prstGeom>
-          <a:noFill/>
-        </p:spPr>
-        <p:txBody>
-          <a:bodyPr wrap="square">
-            <a:spAutoFit/>
-          </a:bodyPr>
-          <a:lstStyle/>
-          <a:p>
-            <a:pPr algn="l"/>
-            <a:r>
-              <a:rPr sz="2400" b="1" i="0">
-                <a:solidFill>
-                  <a:srgbClr val="FFFFFF"/>
-                </a:solidFill>
-              </a:rPr>
-              <a:t>Deux sources. Un signal. Une décision.</a:t>
-            </a:r>
-          </a:p>
-        </p:txBody>
-      </p:sp>
-      <p:sp>
-        <p:nvSpPr>
-          <p:cNvPr id="5" name="Rectangle 4"/>
+          </a:p>
+        </p:txBody>
+      </p:sp>
+      <p:sp>
+        <p:nvSpPr>
+          <p:cNvPr id="11" name="Rectangle 10"/>
           <p:cNvSpPr/>
           <p:nvPr/>
         </p:nvSpPr>
         <p:spPr>
           <a:xfrm>
-            <a:off x="502920" y="1024128"/>
-            <a:ext cx="822960" cy="45720"/>
+            <a:off x="685800" y="2926080"/>
+            <a:ext cx="10972800" cy="1280160"/>
           </a:xfrm>
           <a:prstGeom prst="rect">
             <a:avLst/>
           </a:prstGeom>
           <a:solidFill>
-            <a:srgbClr val="059669"/>
+            <a:srgbClr val="1E293B"/>
           </a:solidFill>
           <a:ln>
             <a:noFill/>
@@ -5583,64 +6300,19 @@
           <a:lstStyle/>
           <a:p>
             <a:pPr algn="ctr"/>
-            <a:endParaRPr/>
-          </a:p>
-        </p:txBody>
-      </p:sp>
-      <p:sp>
-        <p:nvSpPr>
-          <p:cNvPr id="6" name="Rectangle 5"/>
-          <p:cNvSpPr/>
-          <p:nvPr/>
-        </p:nvSpPr>
-        <p:spPr>
-          <a:xfrm>
-            <a:off x="502920" y="1234440"/>
-            <a:ext cx="73152" cy="347472"/>
-          </a:xfrm>
-          <a:prstGeom prst="rect">
-            <a:avLst/>
-          </a:prstGeom>
-          <a:solidFill>
-            <a:srgbClr val="059669"/>
-          </a:solidFill>
-          <a:ln>
-            <a:noFill/>
-          </a:ln>
-        </p:spPr>
-        <p:style>
-          <a:lnRef idx="1">
-            <a:schemeClr val="accent1"/>
-          </a:lnRef>
-          <a:fillRef idx="3">
-            <a:schemeClr val="accent1"/>
-          </a:fillRef>
-          <a:effectRef idx="2">
-            <a:schemeClr val="accent1"/>
-          </a:effectRef>
-          <a:fontRef idx="minor">
-            <a:schemeClr val="lt1"/>
-          </a:fontRef>
-        </p:style>
-        <p:txBody>
-          <a:bodyPr rtlCol="0" anchor="ctr"/>
-          <a:lstStyle/>
-          <a:p>
-            <a:pPr algn="ctr"/>
-            <a:endParaRPr/>
-          </a:p>
-        </p:txBody>
-      </p:sp>
-      <p:sp>
-        <p:nvSpPr>
-          <p:cNvPr id="7" name="TextBox 6"/>
+          </a:p>
+        </p:txBody>
+      </p:sp>
+      <p:sp>
+        <p:nvSpPr>
+          <p:cNvPr id="12" name="TextBox 11"/>
           <p:cNvSpPr txBox="1"/>
           <p:nvPr/>
         </p:nvSpPr>
         <p:spPr>
           <a:xfrm>
-            <a:off x="685800" y="1234440"/>
-            <a:ext cx="2651760" cy="365760"/>
+            <a:off x="868680" y="2999232"/>
+            <a:ext cx="7772400" cy="685800"/>
           </a:xfrm>
           <a:prstGeom prst="rect">
             <a:avLst/>
@@ -5655,26 +6327,26 @@
           <a:p>
             <a:pPr algn="l"/>
             <a:r>
-              <a:rPr sz="1400" b="1" i="0">
+              <a:rPr sz="3000" b="1" i="0">
                 <a:solidFill>
                   <a:srgbClr val="059669"/>
                 </a:solidFill>
               </a:rPr>
-              <a:t>GDELT</a:t>
-            </a:r>
-          </a:p>
-        </p:txBody>
-      </p:sp>
-      <p:sp>
-        <p:nvSpPr>
-          <p:cNvPr id="8" name="TextBox 7"/>
+              <a:t>quelques milliers €/an</a:t>
+            </a:r>
+          </a:p>
+        </p:txBody>
+      </p:sp>
+      <p:sp>
+        <p:nvSpPr>
+          <p:cNvPr id="13" name="TextBox 12"/>
           <p:cNvSpPr txBox="1"/>
           <p:nvPr/>
         </p:nvSpPr>
         <p:spPr>
           <a:xfrm>
-            <a:off x="3429000" y="1234440"/>
-            <a:ext cx="2468880" cy="365760"/>
+            <a:off x="868680" y="3703320"/>
+            <a:ext cx="9601200" cy="411480"/>
           </a:xfrm>
           <a:prstGeom prst="rect">
             <a:avLst/>
@@ -5689,192 +6361,12 @@
           <a:p>
             <a:pPr algn="l"/>
             <a:r>
-              <a:rPr sz="1200" b="0" i="0">
-                <a:solidFill>
-                  <a:srgbClr val="64748B"/>
-                </a:solidFill>
-              </a:rPr>
-              <a:t>Médias internationaux · toutes les 15 min</a:t>
-            </a:r>
-          </a:p>
-        </p:txBody>
-      </p:sp>
-      <p:sp>
-        <p:nvSpPr>
-          <p:cNvPr id="9" name="TextBox 8"/>
-          <p:cNvSpPr txBox="1"/>
-          <p:nvPr/>
-        </p:nvSpPr>
-        <p:spPr>
-          <a:xfrm>
-            <a:off x="822960" y="1600200"/>
-            <a:ext cx="320040" cy="274320"/>
-          </a:xfrm>
-          <a:prstGeom prst="rect">
-            <a:avLst/>
-          </a:prstGeom>
-          <a:noFill/>
-        </p:spPr>
-        <p:txBody>
-          <a:bodyPr wrap="square">
-            <a:spAutoFit/>
-          </a:bodyPr>
-          <a:lstStyle/>
-          <a:p>
-            <a:pPr algn="l"/>
-            <a:r>
-              <a:rPr sz="1300" b="0" i="0">
-                <a:solidFill>
-                  <a:srgbClr val="64748B"/>
-                </a:solidFill>
-              </a:rPr>
-              <a:t>↓</a:t>
-            </a:r>
-          </a:p>
-        </p:txBody>
-      </p:sp>
-      <p:sp>
-        <p:nvSpPr>
-          <p:cNvPr id="10" name="Rectangle 9"/>
-          <p:cNvSpPr/>
-          <p:nvPr/>
-        </p:nvSpPr>
-        <p:spPr>
-          <a:xfrm>
-            <a:off x="502920" y="1856232"/>
-            <a:ext cx="73152" cy="347472"/>
-          </a:xfrm>
-          <a:prstGeom prst="rect">
-            <a:avLst/>
-          </a:prstGeom>
-          <a:solidFill>
-            <a:srgbClr val="059669"/>
-          </a:solidFill>
-          <a:ln>
-            <a:noFill/>
-          </a:ln>
-        </p:spPr>
-        <p:style>
-          <a:lnRef idx="1">
-            <a:schemeClr val="accent1"/>
-          </a:lnRef>
-          <a:fillRef idx="3">
-            <a:schemeClr val="accent1"/>
-          </a:fillRef>
-          <a:effectRef idx="2">
-            <a:schemeClr val="accent1"/>
-          </a:effectRef>
-          <a:fontRef idx="minor">
-            <a:schemeClr val="lt1"/>
-          </a:fontRef>
-        </p:style>
-        <p:txBody>
-          <a:bodyPr rtlCol="0" anchor="ctr"/>
-          <a:lstStyle/>
-          <a:p>
-            <a:pPr algn="ctr"/>
-            <a:endParaRPr/>
-          </a:p>
-        </p:txBody>
-      </p:sp>
-      <p:sp>
-        <p:nvSpPr>
-          <p:cNvPr id="11" name="TextBox 10"/>
-          <p:cNvSpPr txBox="1"/>
-          <p:nvPr/>
-        </p:nvSpPr>
-        <p:spPr>
-          <a:xfrm>
-            <a:off x="685800" y="1856232"/>
-            <a:ext cx="2651760" cy="365760"/>
-          </a:xfrm>
-          <a:prstGeom prst="rect">
-            <a:avLst/>
-          </a:prstGeom>
-          <a:noFill/>
-        </p:spPr>
-        <p:txBody>
-          <a:bodyPr wrap="square">
-            <a:spAutoFit/>
-          </a:bodyPr>
-          <a:lstStyle/>
-          <a:p>
-            <a:pPr algn="l"/>
-            <a:r>
-              <a:rPr sz="1400" b="1" i="0">
-                <a:solidFill>
-                  <a:srgbClr val="059669"/>
-                </a:solidFill>
-              </a:rPr>
-              <a:t>Signalements terrain</a:t>
-            </a:r>
-          </a:p>
-        </p:txBody>
-      </p:sp>
-      <p:sp>
-        <p:nvSpPr>
-          <p:cNvPr id="12" name="TextBox 11"/>
-          <p:cNvSpPr txBox="1"/>
-          <p:nvPr/>
-        </p:nvSpPr>
-        <p:spPr>
-          <a:xfrm>
-            <a:off x="3429000" y="1856232"/>
-            <a:ext cx="2468880" cy="365760"/>
-          </a:xfrm>
-          <a:prstGeom prst="rect">
-            <a:avLst/>
-          </a:prstGeom>
-          <a:noFill/>
-        </p:spPr>
-        <p:txBody>
-          <a:bodyPr wrap="square">
-            <a:spAutoFit/>
-          </a:bodyPr>
-          <a:lstStyle/>
-          <a:p>
-            <a:pPr algn="l"/>
-            <a:r>
-              <a:rPr sz="1200" b="0" i="0">
-                <a:solidFill>
-                  <a:srgbClr val="64748B"/>
-                </a:solidFill>
-              </a:rPr>
-              <a:t>Citoyens + ONG · géolocalisés GPS</a:t>
-            </a:r>
-          </a:p>
-        </p:txBody>
-      </p:sp>
-      <p:sp>
-        <p:nvSpPr>
-          <p:cNvPr id="13" name="TextBox 12"/>
-          <p:cNvSpPr txBox="1"/>
-          <p:nvPr/>
-        </p:nvSpPr>
-        <p:spPr>
-          <a:xfrm>
-            <a:off x="822960" y="2221992"/>
-            <a:ext cx="320040" cy="274320"/>
-          </a:xfrm>
-          <a:prstGeom prst="rect">
-            <a:avLst/>
-          </a:prstGeom>
-          <a:noFill/>
-        </p:spPr>
-        <p:txBody>
-          <a:bodyPr wrap="square">
-            <a:spAutoFit/>
-          </a:bodyPr>
-          <a:lstStyle/>
-          <a:p>
-            <a:pPr algn="l"/>
-            <a:r>
-              <a:rPr sz="1300" b="0" i="0">
-                <a:solidFill>
-                  <a:srgbClr val="64748B"/>
-                </a:solidFill>
-              </a:rPr>
-              <a:t>↓</a:t>
+              <a:rPr sz="1400" b="0" i="0">
+                <a:solidFill>
+                  <a:srgbClr val="CBD5E1"/>
+                </a:solidFill>
+              </a:rPr>
+              <a:t>abonnement annuel à TERROIR</a:t>
             </a:r>
           </a:p>
         </p:txBody>
@@ -5887,8 +6379,8 @@
         </p:nvSpPr>
         <p:spPr>
           <a:xfrm>
-            <a:off x="502920" y="2478024"/>
-            <a:ext cx="73152" cy="347472"/>
+            <a:off x="502920" y="4434840"/>
+            <a:ext cx="91440" cy="1280160"/>
           </a:xfrm>
           <a:prstGeom prst="rect">
             <a:avLst/>
@@ -5919,128 +6411,25 @@
           <a:lstStyle/>
           <a:p>
             <a:pPr algn="ctr"/>
-            <a:endParaRPr/>
-          </a:p>
-        </p:txBody>
-      </p:sp>
-      <p:sp>
-        <p:nvSpPr>
-          <p:cNvPr id="15" name="TextBox 14"/>
-          <p:cNvSpPr txBox="1"/>
-          <p:nvPr/>
-        </p:nvSpPr>
-        <p:spPr>
-          <a:xfrm>
-            <a:off x="685800" y="2478024"/>
-            <a:ext cx="2651760" cy="365760"/>
-          </a:xfrm>
-          <a:prstGeom prst="rect">
-            <a:avLst/>
-          </a:prstGeom>
-          <a:noFill/>
-        </p:spPr>
-        <p:txBody>
-          <a:bodyPr wrap="square">
-            <a:spAutoFit/>
-          </a:bodyPr>
-          <a:lstStyle/>
-          <a:p>
-            <a:pPr algn="l"/>
-            <a:r>
-              <a:rPr sz="1400" b="1" i="0">
-                <a:solidFill>
-                  <a:srgbClr val="F59E0B"/>
-                </a:solidFill>
-              </a:rPr>
-              <a:t>Carte live</a:t>
-            </a:r>
-          </a:p>
-        </p:txBody>
-      </p:sp>
-      <p:sp>
-        <p:nvSpPr>
-          <p:cNvPr id="16" name="TextBox 15"/>
-          <p:cNvSpPr txBox="1"/>
-          <p:nvPr/>
-        </p:nvSpPr>
-        <p:spPr>
-          <a:xfrm>
-            <a:off x="3429000" y="2478024"/>
-            <a:ext cx="2468880" cy="365760"/>
-          </a:xfrm>
-          <a:prstGeom prst="rect">
-            <a:avLst/>
-          </a:prstGeom>
-          <a:noFill/>
-        </p:spPr>
-        <p:txBody>
-          <a:bodyPr wrap="square">
-            <a:spAutoFit/>
-          </a:bodyPr>
-          <a:lstStyle/>
-          <a:p>
-            <a:pPr algn="l"/>
-            <a:r>
-              <a:rPr sz="1200" b="0" i="0">
-                <a:solidFill>
-                  <a:srgbClr val="64748B"/>
-                </a:solidFill>
-              </a:rPr>
-              <a:t>Un seul tableau de bord, pour tous</a:t>
-            </a:r>
-          </a:p>
-        </p:txBody>
-      </p:sp>
-      <p:sp>
-        <p:nvSpPr>
-          <p:cNvPr id="17" name="TextBox 16"/>
-          <p:cNvSpPr txBox="1"/>
-          <p:nvPr/>
-        </p:nvSpPr>
-        <p:spPr>
-          <a:xfrm>
-            <a:off x="822960" y="2843784"/>
-            <a:ext cx="320040" cy="274320"/>
-          </a:xfrm>
-          <a:prstGeom prst="rect">
-            <a:avLst/>
-          </a:prstGeom>
-          <a:noFill/>
-        </p:spPr>
-        <p:txBody>
-          <a:bodyPr wrap="square">
-            <a:spAutoFit/>
-          </a:bodyPr>
-          <a:lstStyle/>
-          <a:p>
-            <a:pPr algn="l"/>
-            <a:r>
-              <a:rPr sz="1300" b="0" i="0">
-                <a:solidFill>
-                  <a:srgbClr val="64748B"/>
-                </a:solidFill>
-              </a:rPr>
-              <a:t>↓</a:t>
-            </a:r>
-          </a:p>
-        </p:txBody>
-      </p:sp>
-      <p:sp>
-        <p:nvSpPr>
-          <p:cNvPr id="18" name="Rectangle 17"/>
+          </a:p>
+        </p:txBody>
+      </p:sp>
+      <p:sp>
+        <p:nvSpPr>
+          <p:cNvPr id="15" name="Rectangle 14"/>
           <p:cNvSpPr/>
           <p:nvPr/>
         </p:nvSpPr>
         <p:spPr>
           <a:xfrm>
-            <a:off x="502920" y="3099816"/>
-            <a:ext cx="73152" cy="347472"/>
+            <a:off x="685800" y="4434840"/>
+            <a:ext cx="10972800" cy="1280160"/>
           </a:xfrm>
           <a:prstGeom prst="rect">
             <a:avLst/>
           </a:prstGeom>
           <a:solidFill>
-            <a:srgbClr val="F59E0B"/>
+            <a:srgbClr val="1E293B"/>
           </a:solidFill>
           <a:ln>
             <a:noFill/>
@@ -6065,20 +6454,19 @@
           <a:lstStyle/>
           <a:p>
             <a:pPr algn="ctr"/>
-            <a:endParaRPr/>
-          </a:p>
-        </p:txBody>
-      </p:sp>
-      <p:sp>
-        <p:nvSpPr>
-          <p:cNvPr id="19" name="TextBox 18"/>
+          </a:p>
+        </p:txBody>
+      </p:sp>
+      <p:sp>
+        <p:nvSpPr>
+          <p:cNvPr id="16" name="TextBox 15"/>
           <p:cNvSpPr txBox="1"/>
           <p:nvPr/>
         </p:nvSpPr>
         <p:spPr>
           <a:xfrm>
-            <a:off x="685800" y="3099816"/>
-            <a:ext cx="2651760" cy="365760"/>
+            <a:off x="868680" y="4507992"/>
+            <a:ext cx="7772400" cy="685800"/>
           </a:xfrm>
           <a:prstGeom prst="rect">
             <a:avLst/>
@@ -6093,26 +6481,26 @@
           <a:p>
             <a:pPr algn="l"/>
             <a:r>
-              <a:rPr sz="1400" b="1" i="0">
+              <a:rPr sz="3000" b="1" i="0">
                 <a:solidFill>
                   <a:srgbClr val="F59E0B"/>
                 </a:solidFill>
               </a:rPr>
-              <a:t>Score de tension</a:t>
-            </a:r>
-          </a:p>
-        </p:txBody>
-      </p:sp>
-      <p:sp>
-        <p:nvSpPr>
-          <p:cNvPr id="20" name="TextBox 19"/>
+              <a:t>1 évacuation évitée</a:t>
+            </a:r>
+          </a:p>
+        </p:txBody>
+      </p:sp>
+      <p:sp>
+        <p:nvSpPr>
+          <p:cNvPr id="17" name="TextBox 16"/>
           <p:cNvSpPr txBox="1"/>
           <p:nvPr/>
         </p:nvSpPr>
         <p:spPr>
           <a:xfrm>
-            <a:off x="3429000" y="3099816"/>
-            <a:ext cx="2468880" cy="365760"/>
+            <a:off x="868680" y="5212079"/>
+            <a:ext cx="9601200" cy="411480"/>
           </a:xfrm>
           <a:prstGeom prst="rect">
             <a:avLst/>
@@ -6127,26 +6515,26 @@
           <a:p>
             <a:pPr algn="l"/>
             <a:r>
-              <a:rPr sz="1200" b="0" i="0">
-                <a:solidFill>
-                  <a:srgbClr val="64748B"/>
-                </a:solidFill>
-              </a:rPr>
-              <a:t>Par département · calculé quotidiennement</a:t>
-            </a:r>
-          </a:p>
-        </p:txBody>
-      </p:sp>
-      <p:sp>
-        <p:nvSpPr>
-          <p:cNvPr id="21" name="TextBox 20"/>
+              <a:rPr sz="1400" b="0" i="0">
+                <a:solidFill>
+                  <a:srgbClr val="CBD5E1"/>
+                </a:solidFill>
+              </a:rPr>
+              <a:t>= 50 × le coût de l'abonnement</a:t>
+            </a:r>
+          </a:p>
+        </p:txBody>
+      </p:sp>
+      <p:sp>
+        <p:nvSpPr>
+          <p:cNvPr id="18" name="TextBox 17"/>
           <p:cNvSpPr txBox="1"/>
           <p:nvPr/>
         </p:nvSpPr>
         <p:spPr>
           <a:xfrm>
-            <a:off x="822960" y="3465576"/>
-            <a:ext cx="320040" cy="274320"/>
+            <a:off x="502920" y="6016752"/>
+            <a:ext cx="10972800" cy="347472"/>
           </a:xfrm>
           <a:prstGeom prst="rect">
             <a:avLst/>
@@ -6161,422 +6549,12 @@
           <a:p>
             <a:pPr algn="l"/>
             <a:r>
-              <a:rPr sz="1300" b="0" i="0">
+              <a:rPr sz="1200" b="0" i="0">
                 <a:solidFill>
                   <a:srgbClr val="64748B"/>
                 </a:solidFill>
               </a:rPr>
-              <a:t>↓</a:t>
-            </a:r>
-          </a:p>
-        </p:txBody>
-      </p:sp>
-      <p:sp>
-        <p:nvSpPr>
-          <p:cNvPr id="22" name="Rectangle 21"/>
-          <p:cNvSpPr/>
-          <p:nvPr/>
-        </p:nvSpPr>
-        <p:spPr>
-          <a:xfrm>
-            <a:off x="502920" y="3721608"/>
-            <a:ext cx="73152" cy="347472"/>
-          </a:xfrm>
-          <a:prstGeom prst="rect">
-            <a:avLst/>
-          </a:prstGeom>
-          <a:solidFill>
-            <a:srgbClr val="FFFFFF"/>
-          </a:solidFill>
-          <a:ln>
-            <a:noFill/>
-          </a:ln>
-        </p:spPr>
-        <p:style>
-          <a:lnRef idx="1">
-            <a:schemeClr val="accent1"/>
-          </a:lnRef>
-          <a:fillRef idx="3">
-            <a:schemeClr val="accent1"/>
-          </a:fillRef>
-          <a:effectRef idx="2">
-            <a:schemeClr val="accent1"/>
-          </a:effectRef>
-          <a:fontRef idx="minor">
-            <a:schemeClr val="lt1"/>
-          </a:fontRef>
-        </p:style>
-        <p:txBody>
-          <a:bodyPr rtlCol="0" anchor="ctr"/>
-          <a:lstStyle/>
-          <a:p>
-            <a:pPr algn="ctr"/>
-            <a:endParaRPr/>
-          </a:p>
-        </p:txBody>
-      </p:sp>
-      <p:sp>
-        <p:nvSpPr>
-          <p:cNvPr id="23" name="TextBox 22"/>
-          <p:cNvSpPr txBox="1"/>
-          <p:nvPr/>
-        </p:nvSpPr>
-        <p:spPr>
-          <a:xfrm>
-            <a:off x="685800" y="3721608"/>
-            <a:ext cx="2651760" cy="365760"/>
-          </a:xfrm>
-          <a:prstGeom prst="rect">
-            <a:avLst/>
-          </a:prstGeom>
-          <a:noFill/>
-        </p:spPr>
-        <p:txBody>
-          <a:bodyPr wrap="square">
-            <a:spAutoFit/>
-          </a:bodyPr>
-          <a:lstStyle/>
-          <a:p>
-            <a:pPr algn="l"/>
-            <a:r>
-              <a:rPr sz="1400" b="1" i="0">
-                <a:solidFill>
-                  <a:srgbClr val="FFFFFF"/>
-                </a:solidFill>
-              </a:rPr>
-              <a:t>Alerte</a:t>
-            </a:r>
-          </a:p>
-        </p:txBody>
-      </p:sp>
-      <p:sp>
-        <p:nvSpPr>
-          <p:cNvPr id="24" name="TextBox 23"/>
-          <p:cNvSpPr txBox="1"/>
-          <p:nvPr/>
-        </p:nvSpPr>
-        <p:spPr>
-          <a:xfrm>
-            <a:off x="3429000" y="3721608"/>
-            <a:ext cx="2468880" cy="365760"/>
-          </a:xfrm>
-          <a:prstGeom prst="rect">
-            <a:avLst/>
-          </a:prstGeom>
-          <a:noFill/>
-        </p:spPr>
-        <p:txBody>
-          <a:bodyPr wrap="square">
-            <a:spAutoFit/>
-          </a:bodyPr>
-          <a:lstStyle/>
-          <a:p>
-            <a:pPr algn="l"/>
-            <a:r>
-              <a:rPr sz="1200" b="0" i="0">
-                <a:solidFill>
-                  <a:srgbClr val="64748B"/>
-                </a:solidFill>
-              </a:rPr>
-              <a:t>Zone · score · précédent · recommandation</a:t>
-            </a:r>
-          </a:p>
-        </p:txBody>
-      </p:sp>
-      <p:sp>
-        <p:nvSpPr>
-          <p:cNvPr id="25" name="Rectangle 24"/>
-          <p:cNvSpPr/>
-          <p:nvPr/>
-        </p:nvSpPr>
-        <p:spPr>
-          <a:xfrm>
-            <a:off x="6172200" y="1234440"/>
-            <a:ext cx="36576" cy="5029200"/>
-          </a:xfrm>
-          <a:prstGeom prst="rect">
-            <a:avLst/>
-          </a:prstGeom>
-          <a:solidFill>
-            <a:srgbClr val="64748B"/>
-          </a:solidFill>
-          <a:ln>
-            <a:noFill/>
-          </a:ln>
-        </p:spPr>
-        <p:style>
-          <a:lnRef idx="1">
-            <a:schemeClr val="accent1"/>
-          </a:lnRef>
-          <a:fillRef idx="3">
-            <a:schemeClr val="accent1"/>
-          </a:fillRef>
-          <a:effectRef idx="2">
-            <a:schemeClr val="accent1"/>
-          </a:effectRef>
-          <a:fontRef idx="minor">
-            <a:schemeClr val="lt1"/>
-          </a:fontRef>
-        </p:style>
-        <p:txBody>
-          <a:bodyPr rtlCol="0" anchor="ctr"/>
-          <a:lstStyle/>
-          <a:p>
-            <a:pPr algn="ctr"/>
-            <a:endParaRPr/>
-          </a:p>
-        </p:txBody>
-      </p:sp>
-      <p:sp>
-        <p:nvSpPr>
-          <p:cNvPr id="26" name="Rectangle 25"/>
-          <p:cNvSpPr/>
-          <p:nvPr/>
-        </p:nvSpPr>
-        <p:spPr>
-          <a:xfrm>
-            <a:off x="6355080" y="1234440"/>
-            <a:ext cx="5486400" cy="5029200"/>
-          </a:xfrm>
-          <a:prstGeom prst="rect">
-            <a:avLst/>
-          </a:prstGeom>
-          <a:solidFill>
-            <a:srgbClr val="0A0F1A"/>
-          </a:solidFill>
-          <a:ln>
-            <a:noFill/>
-          </a:ln>
-        </p:spPr>
-        <p:style>
-          <a:lnRef idx="1">
-            <a:schemeClr val="accent1"/>
-          </a:lnRef>
-          <a:fillRef idx="3">
-            <a:schemeClr val="accent1"/>
-          </a:fillRef>
-          <a:effectRef idx="2">
-            <a:schemeClr val="accent1"/>
-          </a:effectRef>
-          <a:fontRef idx="minor">
-            <a:schemeClr val="lt1"/>
-          </a:fontRef>
-        </p:style>
-        <p:txBody>
-          <a:bodyPr rtlCol="0" anchor="ctr"/>
-          <a:lstStyle/>
-          <a:p>
-            <a:pPr algn="ctr"/>
-            <a:endParaRPr/>
-          </a:p>
-        </p:txBody>
-      </p:sp>
-      <p:sp>
-        <p:nvSpPr>
-          <p:cNvPr id="27" name="Rectangle 26"/>
-          <p:cNvSpPr/>
-          <p:nvPr/>
-        </p:nvSpPr>
-        <p:spPr>
-          <a:xfrm>
-            <a:off x="6355080" y="1234440"/>
-            <a:ext cx="73152" cy="5029200"/>
-          </a:xfrm>
-          <a:prstGeom prst="rect">
-            <a:avLst/>
-          </a:prstGeom>
-          <a:solidFill>
-            <a:srgbClr val="DC2626"/>
-          </a:solidFill>
-          <a:ln>
-            <a:noFill/>
-          </a:ln>
-        </p:spPr>
-        <p:style>
-          <a:lnRef idx="1">
-            <a:schemeClr val="accent1"/>
-          </a:lnRef>
-          <a:fillRef idx="3">
-            <a:schemeClr val="accent1"/>
-          </a:fillRef>
-          <a:effectRef idx="2">
-            <a:schemeClr val="accent1"/>
-          </a:effectRef>
-          <a:fontRef idx="minor">
-            <a:schemeClr val="lt1"/>
-          </a:fontRef>
-        </p:style>
-        <p:txBody>
-          <a:bodyPr rtlCol="0" anchor="ctr"/>
-          <a:lstStyle/>
-          <a:p>
-            <a:pPr algn="ctr"/>
-            <a:endParaRPr/>
-          </a:p>
-        </p:txBody>
-      </p:sp>
-      <p:sp>
-        <p:nvSpPr>
-          <p:cNvPr id="28" name="TextBox 27"/>
-          <p:cNvSpPr txBox="1"/>
-          <p:nvPr/>
-        </p:nvSpPr>
-        <p:spPr>
-          <a:xfrm>
-            <a:off x="6556248" y="1389888"/>
-            <a:ext cx="5120640" cy="4663440"/>
-          </a:xfrm>
-          <a:prstGeom prst="rect">
-            <a:avLst/>
-          </a:prstGeom>
-          <a:noFill/>
-        </p:spPr>
-        <p:txBody>
-          <a:bodyPr wrap="square">
-            <a:spAutoFit/>
-          </a:bodyPr>
-          <a:lstStyle/>
-          <a:p>
-            <a:pPr algn="l"/>
-            <a:r>
-              <a:rPr sz="1100" b="1" i="0">
-                <a:solidFill>
-                  <a:srgbClr val="DC2626"/>
-                </a:solidFill>
-              </a:rPr>
-              <a:t>EXEMPLE D'ALERTE</a:t>
-            </a:r>
-          </a:p>
-          <a:p>
-            <a:pPr algn="l"/>
-            <a:r>
-              <a:rPr sz="1500" b="1" i="0">
-                <a:solidFill>
-                  <a:srgbClr val="F59E0B"/>
-                </a:solidFill>
-              </a:rPr>
-              <a:t>Alibori — Score 7,2 / 10</a:t>
-            </a:r>
-          </a:p>
-          <a:p>
-            <a:pPr algn="l"/>
-            <a:r>
-              <a:rPr sz="1200" b="0" i="0">
-                <a:solidFill>
-                  <a:srgbClr val="F59E0B"/>
-                </a:solidFill>
-              </a:rPr>
-              <a:t>[Niveau Précaution — seuil 6,0]</a:t>
-            </a:r>
-          </a:p>
-          <a:p>
-            <a:pPr algn="l"/>
-            <a:r>
-              <a:rPr sz="700" b="0" i="0">
-                <a:solidFill>
-                  <a:srgbClr val="CBD5E1"/>
-                </a:solidFill>
-              </a:rPr>
-              <a:t> </a:t>
-            </a:r>
-          </a:p>
-          <a:p>
-            <a:pPr algn="l"/>
-            <a:r>
-              <a:rPr sz="1200" b="1" i="0">
-                <a:solidFill>
-                  <a:srgbClr val="CBD5E1"/>
-                </a:solidFill>
-              </a:rPr>
-              <a:t>Signaux détectés :</a:t>
-            </a:r>
-          </a:p>
-          <a:p>
-            <a:pPr algn="l"/>
-            <a:r>
-              <a:rPr sz="1200" b="0" i="0">
-                <a:solidFill>
-                  <a:srgbClr val="CBD5E1"/>
-                </a:solidFill>
-              </a:rPr>
-              <a:t>— Incidents CAMEO sécuritaires : +78 % sur 14 jours</a:t>
-            </a:r>
-          </a:p>
-          <a:p>
-            <a:pPr algn="l"/>
-            <a:r>
-              <a:rPr sz="1200" b="0" i="0">
-                <a:solidFill>
-                  <a:srgbClr val="CBD5E1"/>
-                </a:solidFill>
-              </a:rPr>
-              <a:t>— Ton moyen : −4,1  (vs −1,8 médiane nationale)</a:t>
-            </a:r>
-          </a:p>
-          <a:p>
-            <a:pPr algn="l"/>
-            <a:r>
-              <a:rPr sz="1200" b="0" i="0">
-                <a:solidFill>
-                  <a:srgbClr val="CBD5E1"/>
-                </a:solidFill>
-              </a:rPr>
-              <a:t>— 5 médias convergent sur la zone</a:t>
-            </a:r>
-          </a:p>
-          <a:p>
-            <a:pPr algn="l"/>
-            <a:r>
-              <a:rPr sz="700" b="0" i="0">
-                <a:solidFill>
-                  <a:srgbClr val="CBD5E1"/>
-                </a:solidFill>
-              </a:rPr>
-              <a:t> </a:t>
-            </a:r>
-          </a:p>
-          <a:p>
-            <a:pPr algn="l"/>
-            <a:r>
-              <a:rPr sz="1100" b="0" i="1">
-                <a:solidFill>
-                  <a:srgbClr val="64748B"/>
-                </a:solidFill>
-              </a:rPr>
-              <a:t>Précédent : mars 2024  (score 6,8 → restriction d'accès 7j)</a:t>
-            </a:r>
-          </a:p>
-          <a:p>
-            <a:pPr algn="l"/>
-            <a:r>
-              <a:rPr sz="700" b="0" i="0">
-                <a:solidFill>
-                  <a:srgbClr val="CBD5E1"/>
-                </a:solidFill>
-              </a:rPr>
-              <a:t> </a:t>
-            </a:r>
-          </a:p>
-          <a:p>
-            <a:pPr algn="l"/>
-            <a:r>
-              <a:rPr sz="1200" b="1" i="0">
-                <a:solidFill>
-                  <a:srgbClr val="059669"/>
-                </a:solidFill>
-              </a:rPr>
-              <a:t>Action : vérification terrain dans les 48h</a:t>
-            </a:r>
-          </a:p>
-          <a:p>
-            <a:pPr algn="l"/>
-            <a:r>
-              <a:rPr sz="1200" b="0" i="0">
-                <a:solidFill>
-                  <a:srgbClr val="059669"/>
-                </a:solidFill>
-              </a:rPr>
-              <a:t>Si confirmé → notifier OCHA</a:t>
+              <a:t>20 ONGs actives au Sahel  —  marché immédiat : 60 000 – 160 000 € / an</a:t>
             </a:r>
           </a:p>
         </p:txBody>
@@ -6590,7 +6568,7 @@
 </file>
 
 <file path=ppt/slides/slide7.xml><?xml version="1.0" encoding="utf-8"?>
-<p:sld xmlns:a="http://schemas.openxmlformats.org/drawingml/2006/main" xmlns:r="http://schemas.openxmlformats.org/officeDocument/2006/relationships" xmlns:p="http://schemas.openxmlformats.org/presentationml/2006/main">
+<p:sld xmlns:a="http://schemas.openxmlformats.org/drawingml/2006/main" xmlns:p="http://schemas.openxmlformats.org/presentationml/2006/main" xmlns:r="http://schemas.openxmlformats.org/officeDocument/2006/relationships">
   <p:cSld>
     <p:bg>
       <p:bgPr>
@@ -6606,14 +6584,520 @@
         <p:cNvGrpSpPr/>
         <p:nvPr/>
       </p:nvGrpSpPr>
-      <p:grpSpPr>
-        <a:xfrm>
-          <a:off x="0" y="0"/>
-          <a:ext cx="0" cy="0"/>
-          <a:chOff x="0" y="0"/>
-          <a:chExt cx="0" cy="0"/>
-        </a:xfrm>
-      </p:grpSpPr>
+      <p:grpSpPr/>
+      <p:sp>
+        <p:nvSpPr>
+          <p:cNvPr id="2" name="Rectangle 1"/>
+          <p:cNvSpPr/>
+          <p:nvPr/>
+        </p:nvSpPr>
+        <p:spPr>
+          <a:xfrm>
+            <a:off x="0" y="0"/>
+            <a:ext cx="82296" cy="6858000"/>
+          </a:xfrm>
+          <a:prstGeom prst="rect">
+            <a:avLst/>
+          </a:prstGeom>
+          <a:solidFill>
+            <a:srgbClr val="059669"/>
+          </a:solidFill>
+          <a:ln>
+            <a:noFill/>
+          </a:ln>
+        </p:spPr>
+        <p:style>
+          <a:lnRef idx="1">
+            <a:schemeClr val="accent1"/>
+          </a:lnRef>
+          <a:fillRef idx="3">
+            <a:schemeClr val="accent1"/>
+          </a:fillRef>
+          <a:effectRef idx="2">
+            <a:schemeClr val="accent1"/>
+          </a:effectRef>
+          <a:fontRef idx="minor">
+            <a:schemeClr val="lt1"/>
+          </a:fontRef>
+        </p:style>
+        <p:txBody>
+          <a:bodyPr rtlCol="0" anchor="ctr"/>
+          <a:lstStyle/>
+          <a:p>
+            <a:pPr algn="ctr"/>
+          </a:p>
+        </p:txBody>
+      </p:sp>
+      <p:sp>
+        <p:nvSpPr>
+          <p:cNvPr id="3" name="TextBox 2"/>
+          <p:cNvSpPr txBox="1"/>
+          <p:nvPr/>
+        </p:nvSpPr>
+        <p:spPr>
+          <a:xfrm>
+            <a:off x="11475720" y="6565392"/>
+            <a:ext cx="594360" cy="201168"/>
+          </a:xfrm>
+          <a:prstGeom prst="rect">
+            <a:avLst/>
+          </a:prstGeom>
+          <a:noFill/>
+        </p:spPr>
+        <p:txBody>
+          <a:bodyPr wrap="square">
+            <a:spAutoFit/>
+          </a:bodyPr>
+          <a:lstStyle/>
+          <a:p>
+            <a:pPr algn="r"/>
+            <a:r>
+              <a:rPr sz="900" b="0" i="0">
+                <a:solidFill>
+                  <a:srgbClr val="64748B"/>
+                </a:solidFill>
+              </a:rPr>
+              <a:t>7 / 8</a:t>
+            </a:r>
+          </a:p>
+        </p:txBody>
+      </p:sp>
+      <p:sp>
+        <p:nvSpPr>
+          <p:cNvPr id="4" name="TextBox 3"/>
+          <p:cNvSpPr txBox="1"/>
+          <p:nvPr/>
+        </p:nvSpPr>
+        <p:spPr>
+          <a:xfrm>
+            <a:off x="502920" y="365760"/>
+            <a:ext cx="10972800" cy="731520"/>
+          </a:xfrm>
+          <a:prstGeom prst="rect">
+            <a:avLst/>
+          </a:prstGeom>
+          <a:noFill/>
+        </p:spPr>
+        <p:txBody>
+          <a:bodyPr wrap="square">
+            <a:spAutoFit/>
+          </a:bodyPr>
+          <a:lstStyle/>
+          <a:p>
+            <a:pPr algn="l"/>
+            <a:r>
+              <a:rPr sz="3000" b="1" i="0">
+                <a:solidFill>
+                  <a:srgbClr val="FFFFFF"/>
+                </a:solidFill>
+              </a:rPr>
+              <a:t>TERROIR surveille. Vous décidez.</a:t>
+            </a:r>
+          </a:p>
+        </p:txBody>
+      </p:sp>
+      <p:sp>
+        <p:nvSpPr>
+          <p:cNvPr id="5" name="Rectangle 4"/>
+          <p:cNvSpPr/>
+          <p:nvPr/>
+        </p:nvSpPr>
+        <p:spPr>
+          <a:xfrm>
+            <a:off x="502920" y="1170432"/>
+            <a:ext cx="1005840" cy="45720"/>
+          </a:xfrm>
+          <a:prstGeom prst="rect">
+            <a:avLst/>
+          </a:prstGeom>
+          <a:solidFill>
+            <a:srgbClr val="059669"/>
+          </a:solidFill>
+          <a:ln>
+            <a:noFill/>
+          </a:ln>
+        </p:spPr>
+        <p:style>
+          <a:lnRef idx="1">
+            <a:schemeClr val="accent1"/>
+          </a:lnRef>
+          <a:fillRef idx="3">
+            <a:schemeClr val="accent1"/>
+          </a:fillRef>
+          <a:effectRef idx="2">
+            <a:schemeClr val="accent1"/>
+          </a:effectRef>
+          <a:fontRef idx="minor">
+            <a:schemeClr val="lt1"/>
+          </a:fontRef>
+        </p:style>
+        <p:txBody>
+          <a:bodyPr rtlCol="0" anchor="ctr"/>
+          <a:lstStyle/>
+          <a:p>
+            <a:pPr algn="ctr"/>
+          </a:p>
+        </p:txBody>
+      </p:sp>
+      <p:sp>
+        <p:nvSpPr>
+          <p:cNvPr id="6" name="Rectangle 5"/>
+          <p:cNvSpPr/>
+          <p:nvPr/>
+        </p:nvSpPr>
+        <p:spPr>
+          <a:xfrm>
+            <a:off x="502920" y="1554480"/>
+            <a:ext cx="91440" cy="1371600"/>
+          </a:xfrm>
+          <a:prstGeom prst="rect">
+            <a:avLst/>
+          </a:prstGeom>
+          <a:solidFill>
+            <a:srgbClr val="059669"/>
+          </a:solidFill>
+          <a:ln>
+            <a:noFill/>
+          </a:ln>
+        </p:spPr>
+        <p:style>
+          <a:lnRef idx="1">
+            <a:schemeClr val="accent1"/>
+          </a:lnRef>
+          <a:fillRef idx="3">
+            <a:schemeClr val="accent1"/>
+          </a:fillRef>
+          <a:effectRef idx="2">
+            <a:schemeClr val="accent1"/>
+          </a:effectRef>
+          <a:fontRef idx="minor">
+            <a:schemeClr val="lt1"/>
+          </a:fontRef>
+        </p:style>
+        <p:txBody>
+          <a:bodyPr rtlCol="0" anchor="ctr"/>
+          <a:lstStyle/>
+          <a:p>
+            <a:pPr algn="ctr"/>
+          </a:p>
+        </p:txBody>
+      </p:sp>
+      <p:sp>
+        <p:nvSpPr>
+          <p:cNvPr id="7" name="TextBox 6"/>
+          <p:cNvSpPr txBox="1"/>
+          <p:nvPr/>
+        </p:nvSpPr>
+        <p:spPr>
+          <a:xfrm>
+            <a:off x="713232" y="1600200"/>
+            <a:ext cx="10972800" cy="502920"/>
+          </a:xfrm>
+          <a:prstGeom prst="rect">
+            <a:avLst/>
+          </a:prstGeom>
+          <a:noFill/>
+        </p:spPr>
+        <p:txBody>
+          <a:bodyPr wrap="square">
+            <a:spAutoFit/>
+          </a:bodyPr>
+          <a:lstStyle/>
+          <a:p>
+            <a:pPr algn="l"/>
+            <a:r>
+              <a:rPr sz="1800" b="1" i="0">
+                <a:solidFill>
+                  <a:srgbClr val="FFFFFF"/>
+                </a:solidFill>
+              </a:rPr>
+              <a:t>Signal avant l'incident — pas après.</a:t>
+            </a:r>
+          </a:p>
+        </p:txBody>
+      </p:sp>
+      <p:sp>
+        <p:nvSpPr>
+          <p:cNvPr id="8" name="TextBox 7"/>
+          <p:cNvSpPr txBox="1"/>
+          <p:nvPr/>
+        </p:nvSpPr>
+        <p:spPr>
+          <a:xfrm>
+            <a:off x="713232" y="2148840"/>
+            <a:ext cx="10972800" cy="685800"/>
+          </a:xfrm>
+          <a:prstGeom prst="rect">
+            <a:avLst/>
+          </a:prstGeom>
+          <a:noFill/>
+        </p:spPr>
+        <p:txBody>
+          <a:bodyPr wrap="square">
+            <a:spAutoFit/>
+          </a:bodyPr>
+          <a:lstStyle/>
+          <a:p>
+            <a:pPr algn="l"/>
+            <a:r>
+              <a:rPr sz="1300" b="0" i="0">
+                <a:solidFill>
+                  <a:srgbClr val="64748B"/>
+                </a:solidFill>
+              </a:rPr>
+              <a:t>ACLED documente. TERROIR détecte les précurseurs médiatiques dans la fenêtre pré-incident. Ces deux approches sont complémentaires.</a:t>
+            </a:r>
+          </a:p>
+        </p:txBody>
+      </p:sp>
+      <p:sp>
+        <p:nvSpPr>
+          <p:cNvPr id="9" name="Rectangle 8"/>
+          <p:cNvSpPr/>
+          <p:nvPr/>
+        </p:nvSpPr>
+        <p:spPr>
+          <a:xfrm>
+            <a:off x="502920" y="3154680"/>
+            <a:ext cx="91440" cy="1371600"/>
+          </a:xfrm>
+          <a:prstGeom prst="rect">
+            <a:avLst/>
+          </a:prstGeom>
+          <a:solidFill>
+            <a:srgbClr val="22D3EE"/>
+          </a:solidFill>
+          <a:ln>
+            <a:noFill/>
+          </a:ln>
+        </p:spPr>
+        <p:style>
+          <a:lnRef idx="1">
+            <a:schemeClr val="accent1"/>
+          </a:lnRef>
+          <a:fillRef idx="3">
+            <a:schemeClr val="accent1"/>
+          </a:fillRef>
+          <a:effectRef idx="2">
+            <a:schemeClr val="accent1"/>
+          </a:effectRef>
+          <a:fontRef idx="minor">
+            <a:schemeClr val="lt1"/>
+          </a:fontRef>
+        </p:style>
+        <p:txBody>
+          <a:bodyPr rtlCol="0" anchor="ctr"/>
+          <a:lstStyle/>
+          <a:p>
+            <a:pPr algn="ctr"/>
+          </a:p>
+        </p:txBody>
+      </p:sp>
+      <p:sp>
+        <p:nvSpPr>
+          <p:cNvPr id="10" name="TextBox 9"/>
+          <p:cNvSpPr txBox="1"/>
+          <p:nvPr/>
+        </p:nvSpPr>
+        <p:spPr>
+          <a:xfrm>
+            <a:off x="713232" y="3200400"/>
+            <a:ext cx="10972800" cy="502920"/>
+          </a:xfrm>
+          <a:prstGeom prst="rect">
+            <a:avLst/>
+          </a:prstGeom>
+          <a:noFill/>
+        </p:spPr>
+        <p:txBody>
+          <a:bodyPr wrap="square">
+            <a:spAutoFit/>
+          </a:bodyPr>
+          <a:lstStyle/>
+          <a:p>
+            <a:pPr algn="l"/>
+            <a:r>
+              <a:rPr sz="1800" b="1" i="0">
+                <a:solidFill>
+                  <a:srgbClr val="FFFFFF"/>
+                </a:solidFill>
+              </a:rPr>
+              <a:t>Médias internationaux + terrain combinés.</a:t>
+            </a:r>
+          </a:p>
+        </p:txBody>
+      </p:sp>
+      <p:sp>
+        <p:nvSpPr>
+          <p:cNvPr id="11" name="TextBox 10"/>
+          <p:cNvSpPr txBox="1"/>
+          <p:nvPr/>
+        </p:nvSpPr>
+        <p:spPr>
+          <a:xfrm>
+            <a:off x="713232" y="3749040"/>
+            <a:ext cx="10972800" cy="685800"/>
+          </a:xfrm>
+          <a:prstGeom prst="rect">
+            <a:avLst/>
+          </a:prstGeom>
+          <a:noFill/>
+        </p:spPr>
+        <p:txBody>
+          <a:bodyPr wrap="square">
+            <a:spAutoFit/>
+          </a:bodyPr>
+          <a:lstStyle/>
+          <a:p>
+            <a:pPr algn="l"/>
+            <a:r>
+              <a:rPr sz="1300" b="0" i="0">
+                <a:solidFill>
+                  <a:srgbClr val="64748B"/>
+                </a:solidFill>
+              </a:rPr>
+              <a:t>GDELT capte ce que les médias couvrent. Le signalement citoyen GPS corrige le biais géographique. Ni l'un ni l'autre seul ne suffit.</a:t>
+            </a:r>
+          </a:p>
+        </p:txBody>
+      </p:sp>
+      <p:sp>
+        <p:nvSpPr>
+          <p:cNvPr id="12" name="Rectangle 11"/>
+          <p:cNvSpPr/>
+          <p:nvPr/>
+        </p:nvSpPr>
+        <p:spPr>
+          <a:xfrm>
+            <a:off x="502920" y="4754880"/>
+            <a:ext cx="91440" cy="1371600"/>
+          </a:xfrm>
+          <a:prstGeom prst="rect">
+            <a:avLst/>
+          </a:prstGeom>
+          <a:solidFill>
+            <a:srgbClr val="F59E0B"/>
+          </a:solidFill>
+          <a:ln>
+            <a:noFill/>
+          </a:ln>
+        </p:spPr>
+        <p:style>
+          <a:lnRef idx="1">
+            <a:schemeClr val="accent1"/>
+          </a:lnRef>
+          <a:fillRef idx="3">
+            <a:schemeClr val="accent1"/>
+          </a:fillRef>
+          <a:effectRef idx="2">
+            <a:schemeClr val="accent1"/>
+          </a:effectRef>
+          <a:fontRef idx="minor">
+            <a:schemeClr val="lt1"/>
+          </a:fontRef>
+        </p:style>
+        <p:txBody>
+          <a:bodyPr rtlCol="0" anchor="ctr"/>
+          <a:lstStyle/>
+          <a:p>
+            <a:pPr algn="ctr"/>
+          </a:p>
+        </p:txBody>
+      </p:sp>
+      <p:sp>
+        <p:nvSpPr>
+          <p:cNvPr id="13" name="TextBox 12"/>
+          <p:cNvSpPr txBox="1"/>
+          <p:nvPr/>
+        </p:nvSpPr>
+        <p:spPr>
+          <a:xfrm>
+            <a:off x="713232" y="4800600"/>
+            <a:ext cx="10972800" cy="502920"/>
+          </a:xfrm>
+          <a:prstGeom prst="rect">
+            <a:avLst/>
+          </a:prstGeom>
+          <a:noFill/>
+        </p:spPr>
+        <p:txBody>
+          <a:bodyPr wrap="square">
+            <a:spAutoFit/>
+          </a:bodyPr>
+          <a:lstStyle/>
+          <a:p>
+            <a:pPr algn="l"/>
+            <a:r>
+              <a:rPr sz="1800" b="1" i="0">
+                <a:solidFill>
+                  <a:srgbClr val="FFFFFF"/>
+                </a:solidFill>
+              </a:rPr>
+              <a:t>Construit pour l'Afrique de l'Ouest.</a:t>
+            </a:r>
+          </a:p>
+        </p:txBody>
+      </p:sp>
+      <p:sp>
+        <p:nvSpPr>
+          <p:cNvPr id="14" name="TextBox 13"/>
+          <p:cNvSpPr txBox="1"/>
+          <p:nvPr/>
+        </p:nvSpPr>
+        <p:spPr>
+          <a:xfrm>
+            <a:off x="713232" y="5349240"/>
+            <a:ext cx="10972800" cy="685800"/>
+          </a:xfrm>
+          <a:prstGeom prst="rect">
+            <a:avLst/>
+          </a:prstGeom>
+          <a:noFill/>
+        </p:spPr>
+        <p:txBody>
+          <a:bodyPr wrap="square">
+            <a:spAutoFit/>
+          </a:bodyPr>
+          <a:lstStyle/>
+          <a:p>
+            <a:pPr algn="l"/>
+            <a:r>
+              <a:rPr sz="1300" b="0" i="0">
+                <a:solidFill>
+                  <a:srgbClr val="64748B"/>
+                </a:solidFill>
+              </a:rPr>
+              <a:t>Open source. Code auditable. Calibré sur les dynamiques médiatiques locales. Accessible pour une ONG à budget limité au Sahel.</a:t>
+            </a:r>
+          </a:p>
+        </p:txBody>
+      </p:sp>
+    </p:spTree>
+  </p:cSld>
+  <p:clrMapOvr>
+    <a:masterClrMapping/>
+  </p:clrMapOvr>
+</p:sld>
+</file>
+
+<file path=ppt/slides/slide8.xml><?xml version="1.0" encoding="utf-8"?>
+<p:sld xmlns:a="http://schemas.openxmlformats.org/drawingml/2006/main" xmlns:p="http://schemas.openxmlformats.org/presentationml/2006/main" xmlns:r="http://schemas.openxmlformats.org/officeDocument/2006/relationships">
+  <p:cSld>
+    <p:bg>
+      <p:bgPr>
+        <a:solidFill>
+          <a:srgbClr val="0F172A"/>
+        </a:solidFill>
+        <a:effectLst/>
+      </p:bgPr>
+    </p:bg>
+    <p:spTree>
+      <p:nvGrpSpPr>
+        <p:cNvPr id="1" name=""/>
+        <p:cNvGrpSpPr/>
+        <p:nvPr/>
+      </p:nvGrpSpPr>
+      <p:grpSpPr/>
       <p:sp>
         <p:nvSpPr>
           <p:cNvPr id="2" name="TextBox 1"/>
@@ -6690,7 +7174,6 @@
           <a:lstStyle/>
           <a:p>
             <a:pPr algn="ctr"/>
-            <a:endParaRPr/>
           </a:p>
         </p:txBody>
       </p:sp>
@@ -6836,7 +7319,6 @@
           <a:lstStyle/>
           <a:p>
             <a:pPr algn="ctr"/>
-            <a:endParaRPr/>
           </a:p>
         </p:txBody>
       </p:sp>
@@ -6925,7 +7407,6 @@
           <a:lstStyle/>
           <a:p>
             <a:pPr algn="ctr"/>
-            <a:endParaRPr/>
           </a:p>
         </p:txBody>
       </p:sp>
@@ -7005,7 +7486,6 @@
           <a:lstStyle/>
           <a:p>
             <a:pPr algn="ctr"/>
-            <a:endParaRPr/>
           </a:p>
         </p:txBody>
       </p:sp>
@@ -7173,7 +7653,6 @@
           <a:lstStyle/>
           <a:p>
             <a:pPr algn="ctr"/>
-            <a:endParaRPr/>
           </a:p>
         </p:txBody>
       </p:sp>
